--- a/system-design-101/vi/lessons/sd-13-007/slides/sd-13-007.pptx
+++ b/system-design-101/vi/lessons/sd-13-007/slides/sd-13-007.pptx
@@ -1794,7 +1794,7 @@
         <p:spPr>
           <a:xfrm>
             <a:off x="914400" y="1524000"/>
-            <a:ext cx="8191500" cy="1905000"/>
+            <a:ext cx="8191500" cy="3238500"/>
           </a:xfrm>
           <a:prstGeom prst="rect">
             <a:avLst/>
@@ -1803,17 +1803,17 @@
           <a:ln/>
         </p:spPr>
         <p:txBody>
-          <a:bodyPr wrap="square" lIns="0" tIns="56007" rIns="0" bIns="-56007" rtlCol="0" anchor="t"/>
+          <a:bodyPr wrap="square" lIns="0" tIns="72009" rIns="0" bIns="-72009" rtlCol="0" anchor="t"/>
           <a:lstStyle/>
           <a:p>
             <a:pPr algn="l" indent="0" marL="0">
               <a:lnSpc>
-                <a:spcPts val="6552"/>
+                <a:spcPts val="8424"/>
               </a:lnSpc>
               <a:buNone/>
             </a:pPr>
             <a:r>
-              <a:rPr lang="en-US" sz="6300" dirty="0" spc="-107" kern="0">
+              <a:rPr lang="en-US" sz="8100" dirty="0" spc="-135" kern="0">
                 <a:solidFill>
                   <a:srgbClr val="F3EEE3"/>
                 </a:solidFill>
@@ -1824,7 +1824,7 @@
               <a:t>Tăng</a:t>
             </a:r>
             <a:r>
-              <a:rPr lang="en-US" sz="6300" dirty="0" spc="6" kern="0">
+              <a:rPr lang="en-US" sz="8100" dirty="0" spc="0" kern="0">
                 <a:solidFill>
                   <a:srgbClr val="F3EEE3"/>
                 </a:solidFill>
@@ -1835,7 +1835,7 @@
               <a:t> từ</a:t>
             </a:r>
             <a:r>
-              <a:rPr lang="en-US" sz="6300" dirty="0" spc="-7" kern="0">
+              <a:rPr lang="en-US" sz="8100" dirty="0" spc="-10" kern="0">
                 <a:solidFill>
                   <a:srgbClr val="F3EEE3"/>
                 </a:solidFill>
@@ -1846,7 +1846,7 @@
               <a:t> một</a:t>
             </a:r>
             <a:r>
-              <a:rPr lang="en-US" sz="6300" dirty="0" spc="4" kern="0">
+              <a:rPr lang="en-US" sz="8100" dirty="0" spc="2" kern="0">
                 <a:solidFill>
                   <a:srgbClr val="F3EEE3"/>
                 </a:solidFill>
@@ -1857,7 +1857,7 @@
               <a:t> lên</a:t>
             </a:r>
             <a:r>
-              <a:rPr lang="en-US" sz="6300" dirty="0" spc="-3" kern="0">
+              <a:rPr lang="en-US" sz="8100" dirty="0" spc="-7" kern="0">
                 <a:solidFill>
                   <a:srgbClr val="F3EEE3"/>
                 </a:solidFill>
@@ -1868,7 +1868,7 @@
               <a:t> ba</a:t>
             </a:r>
             <a:r>
-              <a:rPr lang="en-US" sz="6300" dirty="0" spc="-1" kern="0">
+              <a:rPr lang="en-US" sz="8100" dirty="0" spc="-5" kern="0">
                 <a:solidFill>
                   <a:srgbClr val="F3EEE3"/>
                 </a:solidFill>
@@ -1879,7 +1879,7 @@
               <a:t> bản</a:t>
             </a:r>
             <a:r>
-              <a:rPr lang="en-US" sz="6300" dirty="0" spc="-3" kern="0">
+              <a:rPr lang="en-US" sz="8100" dirty="0" spc="0" kern="0">
                 <a:solidFill>
                   <a:srgbClr val="F3EEE3"/>
                 </a:solidFill>
@@ -1890,7 +1890,7 @@
               <a:t> sao</a:t>
             </a:r>
             <a:r>
-              <a:rPr lang="en-US" sz="6300" dirty="0" spc="-14" kern="0">
+              <a:rPr lang="en-US" sz="8100" dirty="0" spc="-21" kern="0">
                 <a:solidFill>
                   <a:srgbClr val="F3EEE3"/>
                 </a:solidFill>
@@ -1901,7 +1901,7 @@
               <a:t> thì</a:t>
             </a:r>
             <a:r>
-              <a:rPr lang="en-US" sz="6300" dirty="0" spc="12" kern="0">
+              <a:rPr lang="en-US" sz="8100" dirty="0" spc="11" kern="0">
                 <a:solidFill>
                   <a:srgbClr val="F3EEE3"/>
                 </a:solidFill>
@@ -1912,7 +1912,7 @@
               <a:t> ứng</a:t>
             </a:r>
             <a:r>
-              <a:rPr lang="en-US" sz="6300" dirty="0" spc="1" kern="0">
+              <a:rPr lang="en-US" sz="8100" dirty="0" spc="-1" kern="0">
                 <a:solidFill>
                   <a:srgbClr val="F3EEE3"/>
                 </a:solidFill>
@@ -1923,7 +1923,7 @@
               <a:t> dụng</a:t>
             </a:r>
             <a:r>
-              <a:rPr lang="en-US" sz="6300" dirty="0" spc="0" kern="0">
+              <a:rPr lang="en-US" sz="8100" dirty="0" spc="0" kern="0">
                 <a:solidFill>
                   <a:srgbClr val="F3EEE3"/>
                 </a:solidFill>
@@ -1933,7 +1933,7 @@
               </a:rPr>
               <a:t> hỏng</a:t>
             </a:r>
-            <a:endParaRPr lang="en-US" sz="6300" dirty="0"/>
+            <a:endParaRPr lang="en-US" sz="8100" dirty="0"/>
           </a:p>
         </p:txBody>
       </p:sp>
@@ -1945,7 +1945,7 @@
         </p:nvSpPr>
         <p:spPr>
           <a:xfrm>
-            <a:off x="914400" y="4000500"/>
+            <a:off x="914400" y="5143500"/>
             <a:ext cx="8191500" cy="1047750"/>
           </a:xfrm>
           <a:prstGeom prst="rect">
@@ -2075,7 +2075,7 @@
         </p:nvSpPr>
         <p:spPr>
           <a:xfrm>
-            <a:off x="914400" y="5143500"/>
+            <a:off x="914400" y="6286500"/>
             <a:ext cx="8191500" cy="419100"/>
           </a:xfrm>
           <a:prstGeom prst="rect">
@@ -2252,7 +2252,7 @@
               <a:t> nhóm</a:t>
             </a:r>
             <a:r>
-              <a:rPr lang="en-US" sz="1650" dirty="0" spc="-3" kern="0">
+              <a:rPr lang="en-US" sz="1650" dirty="0" spc="-4" kern="0">
                 <a:solidFill>
                   <a:srgbClr val="9AA0B5"/>
                 </a:solidFill>
@@ -2260,10 +2260,10 @@
                 <a:ea typeface="Be Vietnam Pro" pitchFamily="34" charset="-122"/>
                 <a:cs typeface="Be Vietnam Pro" pitchFamily="34" charset="-120"/>
               </a:rPr>
-              <a:t> Quan</a:t>
-            </a:r>
-            <a:r>
-              <a:rPr lang="en-US" sz="1650" dirty="0" spc="-9" kern="0">
+              <a:t> DevOps</a:t>
+            </a:r>
+            <a:r>
+              <a:rPr lang="en-US" sz="1650" dirty="0" spc="-7" kern="0">
                 <a:solidFill>
                   <a:srgbClr val="9AA0B5"/>
                 </a:solidFill>
@@ -2271,7 +2271,7 @@
                 <a:ea typeface="Be Vietnam Pro" pitchFamily="34" charset="-122"/>
                 <a:cs typeface="Be Vietnam Pro" pitchFamily="34" charset="-120"/>
               </a:rPr>
-              <a:t> sát</a:t>
+              <a:t> và</a:t>
             </a:r>
             <a:r>
               <a:rPr lang="en-US" sz="1650" dirty="0" spc="3" kern="0">
@@ -2282,18 +2282,7 @@
                 <a:ea typeface="Be Vietnam Pro" pitchFamily="34" charset="-122"/>
                 <a:cs typeface="Be Vietnam Pro" pitchFamily="34" charset="-120"/>
               </a:rPr>
-              <a:t> hệ</a:t>
-            </a:r>
-            <a:r>
-              <a:rPr lang="en-US" sz="1650" dirty="0" spc="1" kern="0">
-                <a:solidFill>
-                  <a:srgbClr val="9AA0B5"/>
-                </a:solidFill>
-                <a:latin typeface="Be Vietnam Pro" pitchFamily="34" charset="0"/>
-                <a:ea typeface="Be Vietnam Pro" pitchFamily="34" charset="-122"/>
-                <a:cs typeface="Be Vietnam Pro" pitchFamily="34" charset="-120"/>
-              </a:rPr>
-              <a:t> thống</a:t>
+              <a:t> CI/CD</a:t>
             </a:r>
             <a:endParaRPr lang="en-US" sz="1650" dirty="0"/>
           </a:p>
@@ -14034,7 +14023,7 @@
         <p:spPr>
           <a:xfrm>
             <a:off x="914400" y="1333500"/>
-            <a:ext cx="16459200" cy="1238250"/>
+            <a:ext cx="16459200" cy="1085850"/>
           </a:xfrm>
           <a:prstGeom prst="rect">
             <a:avLst/>
@@ -14050,7 +14039,7 @@
               <a:buNone/>
             </a:pPr>
             <a:r>
-              <a:rPr lang="en-US" sz="6300" dirty="0" spc="-12" kern="0">
+              <a:rPr lang="en-US" sz="6900" dirty="0" spc="-4" kern="0">
                 <a:solidFill>
                   <a:srgbClr val="14161C"/>
                 </a:solidFill>
@@ -14058,10 +14047,10 @@
                 <a:ea typeface="Bricolage Grotesque ExtraBold" pitchFamily="34" charset="-122"/>
                 <a:cs typeface="Bricolage Grotesque ExtraBold" pitchFamily="34" charset="-120"/>
               </a:rPr>
-              <a:t>Lên</a:t>
-            </a:r>
-            <a:r>
-              <a:rPr lang="en-US" sz="6300" dirty="0" spc="-3" kern="0">
+              <a:t>Ba bản</a:t>
+            </a:r>
+            <a:r>
+              <a:rPr lang="en-US" sz="6900" dirty="0" spc="-21" kern="0">
                 <a:solidFill>
                   <a:srgbClr val="14161C"/>
                 </a:solidFill>
@@ -14069,10 +14058,10 @@
                 <a:ea typeface="Bricolage Grotesque ExtraBold" pitchFamily="34" charset="-122"/>
                 <a:cs typeface="Bricolage Grotesque ExtraBold" pitchFamily="34" charset="-120"/>
               </a:rPr>
-              <a:t> ba</a:t>
-            </a:r>
-            <a:r>
-              <a:rPr lang="en-US" sz="6300" dirty="0" spc="-1" kern="0">
+              <a:t> sao,</a:t>
+            </a:r>
+            <a:r>
+              <a:rPr lang="en-US" sz="6900" dirty="0" spc="1" kern="0">
                 <a:solidFill>
                   <a:srgbClr val="14161C"/>
                 </a:solidFill>
@@ -14080,10 +14069,10 @@
                 <a:ea typeface="Bricolage Grotesque ExtraBold" pitchFamily="34" charset="-122"/>
                 <a:cs typeface="Bricolage Grotesque ExtraBold" pitchFamily="34" charset="-120"/>
               </a:rPr>
-              <a:t> bản</a:t>
-            </a:r>
-            <a:r>
-              <a:rPr lang="en-US" sz="6300" dirty="0" spc="-20" kern="0">
+              <a:t> bị</a:t>
+            </a:r>
+            <a:r>
+              <a:rPr lang="en-US" sz="6900" dirty="0" spc="7" kern="0">
                 <a:solidFill>
                   <a:srgbClr val="14161C"/>
                 </a:solidFill>
@@ -14091,10 +14080,10 @@
                 <a:ea typeface="Bricolage Grotesque ExtraBold" pitchFamily="34" charset="-122"/>
                 <a:cs typeface="Bricolage Grotesque ExtraBold" pitchFamily="34" charset="-120"/>
               </a:rPr>
-              <a:t> sao,</a:t>
-            </a:r>
-            <a:r>
-              <a:rPr lang="en-US" sz="6300" dirty="0" spc="3" kern="0">
+              <a:t> đăng</a:t>
+            </a:r>
+            <a:r>
+              <a:rPr lang="en-US" sz="6900" dirty="0" spc="-3" kern="0">
                 <a:solidFill>
                   <a:srgbClr val="14161C"/>
                 </a:solidFill>
@@ -14102,53 +14091,9 @@
                 <a:ea typeface="Bricolage Grotesque ExtraBold" pitchFamily="34" charset="-122"/>
                 <a:cs typeface="Bricolage Grotesque ExtraBold" pitchFamily="34" charset="-120"/>
               </a:rPr>
-              <a:t> thỉnh</a:t>
-            </a:r>
-            <a:r>
-              <a:rPr lang="en-US" sz="6300" dirty="0" spc="-4" kern="0">
-                <a:solidFill>
-                  <a:srgbClr val="14161C"/>
-                </a:solidFill>
-                <a:latin typeface="Bricolage Grotesque ExtraBold" pitchFamily="34" charset="0"/>
-                <a:ea typeface="Bricolage Grotesque ExtraBold" pitchFamily="34" charset="-122"/>
-                <a:cs typeface="Bricolage Grotesque ExtraBold" pitchFamily="34" charset="-120"/>
-              </a:rPr>
-              <a:t> thoảng</a:t>
-            </a:r>
-            <a:r>
-              <a:rPr lang="en-US" sz="6300" dirty="0" spc="3" kern="0">
-                <a:solidFill>
-                  <a:srgbClr val="14161C"/>
-                </a:solidFill>
-                <a:latin typeface="Bricolage Grotesque ExtraBold" pitchFamily="34" charset="0"/>
-                <a:ea typeface="Bricolage Grotesque ExtraBold" pitchFamily="34" charset="-122"/>
-                <a:cs typeface="Bricolage Grotesque ExtraBold" pitchFamily="34" charset="-120"/>
-              </a:rPr>
-              <a:t> bị</a:t>
-            </a:r>
-            <a:r>
-              <a:rPr lang="en-US" sz="6300" dirty="0" spc="8" kern="0">
-                <a:solidFill>
-                  <a:srgbClr val="14161C"/>
-                </a:solidFill>
-                <a:latin typeface="Bricolage Grotesque ExtraBold" pitchFamily="34" charset="0"/>
-                <a:ea typeface="Bricolage Grotesque ExtraBold" pitchFamily="34" charset="-122"/>
-                <a:cs typeface="Bricolage Grotesque ExtraBold" pitchFamily="34" charset="-120"/>
-              </a:rPr>
-              <a:t> đăng</a:t>
-            </a:r>
-            <a:r>
-              <a:rPr lang="en-US" sz="6300" dirty="0" spc="-3" kern="0">
-                <a:solidFill>
-                  <a:srgbClr val="14161C"/>
-                </a:solidFill>
-                <a:latin typeface="Bricolage Grotesque ExtraBold" pitchFamily="34" charset="0"/>
-                <a:ea typeface="Bricolage Grotesque ExtraBold" pitchFamily="34" charset="-122"/>
-                <a:cs typeface="Bricolage Grotesque ExtraBold" pitchFamily="34" charset="-120"/>
-              </a:rPr>
               <a:t> xuất?</a:t>
             </a:r>
-            <a:endParaRPr lang="en-US" sz="6300" dirty="0"/>
+            <a:endParaRPr lang="en-US" sz="6900" dirty="0"/>
           </a:p>
         </p:txBody>
       </p:sp>
@@ -15456,7 +15401,7 @@
         <p:spPr>
           <a:xfrm>
             <a:off x="914400" y="1333500"/>
-            <a:ext cx="16459200" cy="1143000"/>
+            <a:ext cx="16459200" cy="1085850"/>
           </a:xfrm>
           <a:prstGeom prst="rect">
             <a:avLst/>
@@ -15472,7 +15417,7 @@
               <a:buNone/>
             </a:pPr>
             <a:r>
-              <a:rPr lang="en-US" sz="6600" dirty="0" spc="-1" kern="0">
+              <a:rPr lang="en-US" sz="6900" dirty="0" spc="1" kern="0">
                 <a:solidFill>
                   <a:srgbClr val="F3EEE3"/>
                 </a:solidFill>
@@ -15483,7 +15428,7 @@
               <a:t>Gỡ</a:t>
             </a:r>
             <a:r>
-              <a:rPr lang="en-US" sz="6600" dirty="0" spc="8" kern="0">
+              <a:rPr lang="en-US" sz="6900" dirty="0" spc="9" kern="0">
                 <a:solidFill>
                   <a:srgbClr val="F3EEE3"/>
                 </a:solidFill>
@@ -15494,7 +15439,7 @@
               <a:t> từng</a:t>
             </a:r>
             <a:r>
-              <a:rPr lang="en-US" sz="6600" dirty="0" spc="-2" kern="0">
+              <a:rPr lang="en-US" sz="6900" dirty="0" spc="-1" kern="0">
                 <a:solidFill>
                   <a:srgbClr val="F3EEE3"/>
                 </a:solidFill>
@@ -15505,7 +15450,7 @@
               <a:t> giả</a:t>
             </a:r>
             <a:r>
-              <a:rPr lang="en-US" sz="6600" dirty="0" spc="19" kern="0">
+              <a:rPr lang="en-US" sz="6900" dirty="0" spc="23" kern="0">
                 <a:solidFill>
                   <a:srgbClr val="F3EEE3"/>
                 </a:solidFill>
@@ -15516,7 +15461,7 @@
               <a:t> định</a:t>
             </a:r>
             <a:r>
-              <a:rPr lang="en-US" sz="6600" dirty="0" spc="-1" kern="0">
+              <a:rPr lang="en-US" sz="6900" dirty="0" spc="3" kern="0">
                 <a:solidFill>
                   <a:srgbClr val="F3EEE3"/>
                 </a:solidFill>
@@ -15527,7 +15472,7 @@
               <a:t> thế</a:t>
             </a:r>
             <a:r>
-              <a:rPr lang="en-US" sz="6600" dirty="0" spc="2" kern="0">
+              <a:rPr lang="en-US" sz="6900" dirty="0" spc="1" kern="0">
                 <a:solidFill>
                   <a:srgbClr val="F3EEE3"/>
                 </a:solidFill>
@@ -15537,7 +15482,7 @@
               </a:rPr>
               <a:t> nào</a:t>
             </a:r>
-            <a:endParaRPr lang="en-US" sz="6600" dirty="0"/>
+            <a:endParaRPr lang="en-US" sz="6900" dirty="0"/>
           </a:p>
         </p:txBody>
       </p:sp>

--- a/system-design-101/vi/lessons/sd-13-007/slides/sd-13-007.pptx
+++ b/system-design-101/vi/lessons/sd-13-007/slides/sd-13-007.pptx
@@ -6527,7 +6527,7 @@
               <a:buNone/>
             </a:pPr>
             <a:r>
-              <a:rPr lang="en-US" sz="2250" dirty="0" spc="-1" kern="0">
+              <a:rPr lang="en-US" sz="2550" dirty="0" spc="-4" kern="0">
                 <a:solidFill>
                   <a:srgbClr val="FF6A4D"/>
                 </a:solidFill>
@@ -6535,10 +6535,10 @@
                 <a:ea typeface="Be Vietnam Pro" pitchFamily="34" charset="-122"/>
                 <a:cs typeface="Be Vietnam Pro" pitchFamily="34" charset="-120"/>
               </a:rPr>
-              <a:t>Giữ phiên,</a:t>
-            </a:r>
-            <a:r>
-              <a:rPr lang="en-US" sz="2250" dirty="0" spc="-9" kern="0">
+              <a:t>Giữ</a:t>
+            </a:r>
+            <a:r>
+              <a:rPr lang="en-US" sz="2550" dirty="0" spc="0" kern="0">
                 <a:solidFill>
                   <a:srgbClr val="FF6A4D"/>
                 </a:solidFill>
@@ -6546,10 +6546,10 @@
                 <a:ea typeface="Be Vietnam Pro" pitchFamily="34" charset="-122"/>
                 <a:cs typeface="Be Vietnam Pro" pitchFamily="34" charset="-120"/>
               </a:rPr>
-              <a:t> tệp</a:t>
-            </a:r>
-            <a:r>
-              <a:rPr lang="en-US" sz="2250" dirty="0" spc="-13" kern="0">
+              <a:t> phiên,</a:t>
+            </a:r>
+            <a:r>
+              <a:rPr lang="en-US" sz="2550" dirty="0" spc="-12" kern="0">
                 <a:solidFill>
                   <a:srgbClr val="FF6A4D"/>
                 </a:solidFill>
@@ -6557,10 +6557,10 @@
                 <a:ea typeface="Be Vietnam Pro" pitchFamily="34" charset="-122"/>
                 <a:cs typeface="Be Vietnam Pro" pitchFamily="34" charset="-120"/>
               </a:rPr>
-              <a:t> tải</a:t>
-            </a:r>
-            <a:r>
-              <a:rPr lang="en-US" sz="2250" dirty="0" spc="-1" kern="0">
+              <a:t> tệp tải</a:t>
+            </a:r>
+            <a:r>
+              <a:rPr lang="en-US" sz="2550" dirty="0" spc="0" kern="0">
                 <a:solidFill>
                   <a:srgbClr val="FF6A4D"/>
                 </a:solidFill>
@@ -6571,7 +6571,7 @@
               <a:t> lên,</a:t>
             </a:r>
             <a:r>
-              <a:rPr lang="en-US" sz="2250" dirty="0" spc="1" kern="0">
+              <a:rPr lang="en-US" sz="2550" dirty="0" spc="-5" kern="0">
                 <a:solidFill>
                   <a:srgbClr val="FF6A4D"/>
                 </a:solidFill>
@@ -6582,7 +6582,7 @@
               <a:t> bộ</a:t>
             </a:r>
             <a:r>
-              <a:rPr lang="en-US" sz="2250" dirty="0" spc="2" kern="0">
+              <a:rPr lang="en-US" sz="2550" dirty="0" spc="-1" kern="0">
                 <a:solidFill>
                   <a:srgbClr val="FF6A4D"/>
                 </a:solidFill>
@@ -6593,7 +6593,7 @@
               <a:t> nhớ</a:t>
             </a:r>
             <a:r>
-              <a:rPr lang="en-US" sz="2250" dirty="0" spc="11" kern="0">
+              <a:rPr lang="en-US" sz="2550" dirty="0" spc="14" kern="0">
                 <a:solidFill>
                   <a:srgbClr val="FF6A4D"/>
                 </a:solidFill>
@@ -6603,7 +6603,7 @@
               </a:rPr>
               <a:t> đệm</a:t>
             </a:r>
-            <a:endParaRPr lang="en-US" sz="2250" dirty="0"/>
+            <a:endParaRPr lang="en-US" sz="2550" dirty="0"/>
           </a:p>
         </p:txBody>
       </p:sp>
@@ -6758,7 +6758,7 @@
               <a:buNone/>
             </a:pPr>
             <a:r>
-              <a:rPr lang="en-US" sz="2250" dirty="0" spc="1" kern="0">
+              <a:rPr lang="en-US" sz="2550" dirty="0" spc="-1" kern="0">
                 <a:solidFill>
                   <a:srgbClr val="9AA0B5"/>
                 </a:solidFill>
@@ -6769,7 +6769,7 @@
               <a:t>Không</a:t>
             </a:r>
             <a:r>
-              <a:rPr lang="en-US" sz="2250" dirty="0" spc="-7" kern="0">
+              <a:rPr lang="en-US" sz="2550" dirty="0" spc="-7" kern="0">
                 <a:solidFill>
                   <a:srgbClr val="9AA0B5"/>
                 </a:solidFill>
@@ -6780,7 +6780,7 @@
               <a:t> thấy</a:t>
             </a:r>
             <a:r>
-              <a:rPr lang="en-US" sz="2250" dirty="0" spc="5" kern="0">
+              <a:rPr lang="en-US" sz="2550" dirty="0" spc="-2" kern="0">
                 <a:solidFill>
                   <a:srgbClr val="9AA0B5"/>
                 </a:solidFill>
@@ -6791,7 +6791,7 @@
               <a:t> dữ</a:t>
             </a:r>
             <a:r>
-              <a:rPr lang="en-US" sz="2250" dirty="0" spc="-2" kern="0">
+              <a:rPr lang="en-US" sz="2550" dirty="0" spc="1" kern="0">
                 <a:solidFill>
                   <a:srgbClr val="9AA0B5"/>
                 </a:solidFill>
@@ -6802,7 +6802,7 @@
               <a:t> liệu</a:t>
             </a:r>
             <a:r>
-              <a:rPr lang="en-US" sz="2250" dirty="0" spc="2" kern="0">
+              <a:rPr lang="en-US" sz="2550" dirty="0" spc="-1" kern="0">
                 <a:solidFill>
                   <a:srgbClr val="9AA0B5"/>
                 </a:solidFill>
@@ -6813,7 +6813,7 @@
               <a:t> của</a:t>
             </a:r>
             <a:r>
-              <a:rPr lang="en-US" sz="2250" dirty="0" spc="6" kern="0">
+              <a:rPr lang="en-US" sz="2550" dirty="0" spc="0" kern="0">
                 <a:solidFill>
                   <a:srgbClr val="9AA0B5"/>
                 </a:solidFill>
@@ -6823,7 +6823,7 @@
               </a:rPr>
               <a:t> A</a:t>
             </a:r>
-            <a:endParaRPr lang="en-US" sz="2250" dirty="0"/>
+            <a:endParaRPr lang="en-US" sz="2550" dirty="0"/>
           </a:p>
         </p:txBody>
       </p:sp>
@@ -6967,7 +6967,7 @@
               <a:buNone/>
             </a:pPr>
             <a:r>
-              <a:rPr lang="en-US" sz="2250" dirty="0" spc="1" kern="0">
+              <a:rPr lang="en-US" sz="2550" dirty="0" spc="-1" kern="0">
                 <a:solidFill>
                   <a:srgbClr val="9AA0B5"/>
                 </a:solidFill>
@@ -6978,7 +6978,7 @@
               <a:t>Không</a:t>
             </a:r>
             <a:r>
-              <a:rPr lang="en-US" sz="2250" dirty="0" spc="-7" kern="0">
+              <a:rPr lang="en-US" sz="2550" dirty="0" spc="-7" kern="0">
                 <a:solidFill>
                   <a:srgbClr val="9AA0B5"/>
                 </a:solidFill>
@@ -6989,7 +6989,7 @@
               <a:t> thấy</a:t>
             </a:r>
             <a:r>
-              <a:rPr lang="en-US" sz="2250" dirty="0" spc="5" kern="0">
+              <a:rPr lang="en-US" sz="2550" dirty="0" spc="-2" kern="0">
                 <a:solidFill>
                   <a:srgbClr val="9AA0B5"/>
                 </a:solidFill>
@@ -7000,7 +7000,7 @@
               <a:t> dữ</a:t>
             </a:r>
             <a:r>
-              <a:rPr lang="en-US" sz="2250" dirty="0" spc="-2" kern="0">
+              <a:rPr lang="en-US" sz="2550" dirty="0" spc="1" kern="0">
                 <a:solidFill>
                   <a:srgbClr val="9AA0B5"/>
                 </a:solidFill>
@@ -7011,7 +7011,7 @@
               <a:t> liệu</a:t>
             </a:r>
             <a:r>
-              <a:rPr lang="en-US" sz="2250" dirty="0" spc="2" kern="0">
+              <a:rPr lang="en-US" sz="2550" dirty="0" spc="-1" kern="0">
                 <a:solidFill>
                   <a:srgbClr val="9AA0B5"/>
                 </a:solidFill>
@@ -7022,7 +7022,7 @@
               <a:t> của</a:t>
             </a:r>
             <a:r>
-              <a:rPr lang="en-US" sz="2250" dirty="0" spc="6" kern="0">
+              <a:rPr lang="en-US" sz="2550" dirty="0" spc="0" kern="0">
                 <a:solidFill>
                   <a:srgbClr val="9AA0B5"/>
                 </a:solidFill>
@@ -7032,7 +7032,7 @@
               </a:rPr>
               <a:t> A</a:t>
             </a:r>
-            <a:endParaRPr lang="en-US" sz="2250" dirty="0"/>
+            <a:endParaRPr lang="en-US" sz="2550" dirty="0"/>
           </a:p>
         </p:txBody>
       </p:sp>
@@ -7146,17 +7146,17 @@
           <a:ln/>
         </p:spPr>
         <p:txBody>
-          <a:bodyPr wrap="square" lIns="0" tIns="9144" rIns="0" bIns="-9144" rtlCol="0" anchor="t"/>
+          <a:bodyPr wrap="square" lIns="0" tIns="9700" rIns="0" bIns="-9700" rtlCol="0" anchor="t"/>
           <a:lstStyle/>
           <a:p>
             <a:pPr algn="l" indent="0" marL="0">
               <a:lnSpc>
-                <a:spcPts val="3240"/>
+                <a:spcPts val="3443"/>
               </a:lnSpc>
               <a:buNone/>
             </a:pPr>
             <a:r>
-              <a:rPr lang="en-US" sz="2400" dirty="0" spc="-1" kern="0">
+              <a:rPr lang="en-US" sz="2550" dirty="0" spc="1" kern="0">
                 <a:solidFill>
                   <a:srgbClr val="E4E1D8"/>
                 </a:solidFill>
@@ -7167,7 +7167,7 @@
               <a:t>Cách</a:t>
             </a:r>
             <a:r>
-              <a:rPr lang="en-US" sz="2400" dirty="0" spc="-9" kern="0">
+              <a:rPr lang="en-US" sz="2550" dirty="0" spc="-11" kern="0">
                 <a:solidFill>
                   <a:srgbClr val="E4E1D8"/>
                 </a:solidFill>
@@ -7178,7 +7178,7 @@
               <a:t> gỡ:</a:t>
             </a:r>
             <a:r>
-              <a:rPr lang="en-US" sz="2400" dirty="0" spc="1" kern="0">
+              <a:rPr lang="en-US" sz="2550" dirty="0" spc="-1" kern="0">
                 <a:solidFill>
                   <a:srgbClr val="E4E1D8"/>
                 </a:solidFill>
@@ -7189,7 +7189,7 @@
               <a:t> mọi</a:t>
             </a:r>
             <a:r>
-              <a:rPr lang="en-US" sz="2400" dirty="0" spc="-1" kern="0">
+              <a:rPr lang="en-US" sz="2550" dirty="0" spc="-3" kern="0">
                 <a:solidFill>
                   <a:srgbClr val="E4E1D8"/>
                 </a:solidFill>
@@ -7200,7 +7200,7 @@
               <a:t> bản</a:t>
             </a:r>
             <a:r>
-              <a:rPr lang="en-US" sz="2400" dirty="0" spc="-5" kern="0">
+              <a:rPr lang="en-US" sz="2550" dirty="0" spc="-8" kern="0">
                 <a:solidFill>
                   <a:srgbClr val="E4E1D8"/>
                 </a:solidFill>
@@ -7211,7 +7211,7 @@
               <a:t> sao</a:t>
             </a:r>
             <a:r>
-              <a:rPr lang="en-US" sz="2400" dirty="0" spc="10" kern="0">
+              <a:rPr lang="en-US" sz="2550" dirty="0" spc="10" kern="0">
                 <a:solidFill>
                   <a:srgbClr val="E4E1D8"/>
                 </a:solidFill>
@@ -7222,7 +7222,7 @@
               <a:t> đọc</a:t>
             </a:r>
             <a:r>
-              <a:rPr lang="en-US" sz="2400" dirty="0" spc="0" kern="0">
+              <a:rPr lang="en-US" sz="2550" dirty="0" spc="0" kern="0">
                 <a:solidFill>
                   <a:srgbClr val="E4E1D8"/>
                 </a:solidFill>
@@ -7233,7 +7233,7 @@
               <a:t> ghi</a:t>
             </a:r>
             <a:r>
-              <a:rPr lang="en-US" sz="2400" dirty="0" spc="2" kern="0">
+              <a:rPr lang="en-US" sz="2550" dirty="0" spc="-1" kern="0">
                 <a:solidFill>
                   <a:srgbClr val="E4E1D8"/>
                 </a:solidFill>
@@ -7244,7 +7244,7 @@
               <a:t> cùng</a:t>
             </a:r>
             <a:r>
-              <a:rPr lang="en-US" sz="2400" dirty="0" spc="-3" kern="0">
+              <a:rPr lang="en-US" sz="2550" dirty="0" spc="-5" kern="0">
                 <a:solidFill>
                   <a:srgbClr val="E4E1D8"/>
                 </a:solidFill>
@@ -7255,7 +7255,7 @@
               <a:t> một</a:t>
             </a:r>
             <a:r>
-              <a:rPr lang="en-US" sz="2400" dirty="0" spc="0" kern="0">
+              <a:rPr lang="en-US" sz="2550" dirty="0" spc="1" kern="0">
                 <a:solidFill>
                   <a:srgbClr val="E4E1D8"/>
                 </a:solidFill>
@@ -7265,7 +7265,7 @@
               </a:rPr>
               <a:t> kho.</a:t>
             </a:r>
-            <a:endParaRPr lang="en-US" sz="2400" dirty="0"/>
+            <a:endParaRPr lang="en-US" sz="2550" dirty="0"/>
           </a:p>
         </p:txBody>
       </p:sp>
@@ -8481,7 +8481,7 @@
               <a:buNone/>
             </a:pPr>
             <a:r>
-              <a:rPr lang="en-US" sz="2400" b="1" dirty="0" spc="-5" kern="0">
+              <a:rPr lang="en-US" sz="2550" b="1" dirty="0" spc="-3" kern="0">
                 <a:solidFill>
                   <a:srgbClr val="14161C"/>
                 </a:solidFill>
@@ -8492,7 +8492,7 @@
               <a:t>Cùng</a:t>
             </a:r>
             <a:r>
-              <a:rPr lang="en-US" sz="2400" b="1" dirty="0" spc="-8" kern="0">
+              <a:rPr lang="en-US" sz="2550" b="1" dirty="0" spc="-10" kern="0">
                 <a:solidFill>
                   <a:srgbClr val="14161C"/>
                 </a:solidFill>
@@ -8503,7 +8503,7 @@
               <a:t> một</a:t>
             </a:r>
             <a:r>
-              <a:rPr lang="en-US" sz="2400" b="1" dirty="0" spc="-4" kern="0">
+              <a:rPr lang="en-US" sz="2550" b="1" dirty="0" spc="0" kern="0">
                 <a:solidFill>
                   <a:srgbClr val="14161C"/>
                 </a:solidFill>
@@ -8514,7 +8514,7 @@
               <a:t> việc</a:t>
             </a:r>
             <a:r>
-              <a:rPr lang="en-US" sz="2400" b="1" dirty="0" spc="-9" kern="0">
+              <a:rPr lang="en-US" sz="2550" b="1" dirty="0" spc="-9" kern="0">
                 <a:solidFill>
                   <a:srgbClr val="14161C"/>
                 </a:solidFill>
@@ -8525,7 +8525,7 @@
               <a:t> chạy</a:t>
             </a:r>
             <a:r>
-              <a:rPr lang="en-US" sz="2400" b="1" dirty="0" spc="-1" kern="0">
+              <a:rPr lang="en-US" sz="2550" b="1" dirty="0" spc="-2" kern="0">
                 <a:solidFill>
                   <a:srgbClr val="14161C"/>
                 </a:solidFill>
@@ -8536,7 +8536,7 @@
               <a:t> ba</a:t>
             </a:r>
             <a:r>
-              <a:rPr lang="en-US" sz="2400" b="1" dirty="0" spc="1" kern="0">
+              <a:rPr lang="en-US" sz="2550" b="1" dirty="0" spc="-1" kern="0">
                 <a:solidFill>
                   <a:srgbClr val="14161C"/>
                 </a:solidFill>
@@ -8546,7 +8546,7 @@
               </a:rPr>
               <a:t> lần.</a:t>
             </a:r>
-            <a:endParaRPr lang="en-US" sz="2400" dirty="0"/>
+            <a:endParaRPr lang="en-US" sz="2550" dirty="0"/>
           </a:p>
         </p:txBody>
       </p:sp>
@@ -8882,7 +8882,7 @@
               <a:buNone/>
             </a:pPr>
             <a:r>
-              <a:rPr lang="en-US" sz="2400" b="1" dirty="0" spc="-5" kern="0">
+              <a:rPr lang="en-US" sz="2550" b="1" dirty="0" spc="-1" kern="0">
                 <a:solidFill>
                   <a:srgbClr val="F3EEE3"/>
                 </a:solidFill>
@@ -8893,7 +8893,7 @@
               <a:t>Việc</a:t>
             </a:r>
             <a:r>
-              <a:rPr lang="en-US" sz="2400" b="1" dirty="0" spc="-1" kern="0">
+              <a:rPr lang="en-US" sz="2550" b="1" dirty="0" spc="0" kern="0">
                 <a:solidFill>
                   <a:srgbClr val="F3EEE3"/>
                 </a:solidFill>
@@ -8904,7 +8904,7 @@
               <a:t> chỉ</a:t>
             </a:r>
             <a:r>
-              <a:rPr lang="en-US" sz="2400" b="1" dirty="0" spc="-10" kern="0">
+              <a:rPr lang="en-US" sz="2550" b="1" dirty="0" spc="-9" kern="0">
                 <a:solidFill>
                   <a:srgbClr val="F3EEE3"/>
                 </a:solidFill>
@@ -8912,10 +8912,10 @@
                 <a:ea typeface="Be Vietnam Pro" pitchFamily="34" charset="-122"/>
                 <a:cs typeface="Be Vietnam Pro" pitchFamily="34" charset="-120"/>
               </a:rPr>
-              <a:t> chạy</a:t>
-            </a:r>
-            <a:r>
-              <a:rPr lang="en-US" sz="2400" b="1" dirty="0" spc="-8" kern="0">
+              <a:t> chạy một</a:t>
+            </a:r>
+            <a:r>
+              <a:rPr lang="en-US" sz="2550" b="1" dirty="0" spc="-1" kern="0">
                 <a:solidFill>
                   <a:srgbClr val="F3EEE3"/>
                 </a:solidFill>
@@ -8923,20 +8923,9 @@
                 <a:ea typeface="Be Vietnam Pro" pitchFamily="34" charset="-122"/>
                 <a:cs typeface="Be Vietnam Pro" pitchFamily="34" charset="-120"/>
               </a:rPr>
-              <a:t> một</a:t>
-            </a:r>
-            <a:r>
-              <a:rPr lang="en-US" sz="2400" b="1" dirty="0" spc="1" kern="0">
-                <a:solidFill>
-                  <a:srgbClr val="F3EEE3"/>
-                </a:solidFill>
-                <a:latin typeface="Be Vietnam Pro" pitchFamily="34" charset="0"/>
-                <a:ea typeface="Be Vietnam Pro" pitchFamily="34" charset="-122"/>
-                <a:cs typeface="Be Vietnam Pro" pitchFamily="34" charset="-120"/>
-              </a:rPr>
               <a:t> lần.</a:t>
             </a:r>
-            <a:endParaRPr lang="en-US" sz="2400" dirty="0"/>
+            <a:endParaRPr lang="en-US" sz="2550" dirty="0"/>
           </a:p>
         </p:txBody>
       </p:sp>
@@ -11614,7 +11603,7 @@
               <a:buNone/>
             </a:pPr>
             <a:r>
-              <a:rPr lang="en-US" sz="2250" b="1" dirty="0" spc="-1" kern="0">
+              <a:rPr lang="en-US" sz="2550" b="1" dirty="0" spc="2" kern="0">
                 <a:solidFill>
                   <a:srgbClr val="F3EEE3"/>
                 </a:solidFill>
@@ -11625,7 +11614,7 @@
               <a:t>1.</a:t>
             </a:r>
             <a:r>
-              <a:rPr lang="en-US" sz="2250" b="1" dirty="0" spc="7" kern="0">
+              <a:rPr lang="en-US" sz="2550" b="1" dirty="0" spc="5" kern="0">
                 <a:solidFill>
                   <a:srgbClr val="F3EEE3"/>
                 </a:solidFill>
@@ -11636,7 +11625,7 @@
               <a:t> Giao</a:t>
             </a:r>
             <a:r>
-              <a:rPr lang="en-US" sz="2250" b="1" dirty="0" spc="1" kern="0">
+              <a:rPr lang="en-US" sz="2550" b="1" dirty="0" spc="2" kern="0">
                 <a:solidFill>
                   <a:srgbClr val="F3EEE3"/>
                 </a:solidFill>
@@ -11647,7 +11636,7 @@
               <a:t> tin</a:t>
             </a:r>
             <a:r>
-              <a:rPr lang="en-US" sz="2250" b="1" dirty="0" spc="5" kern="0">
+              <a:rPr lang="en-US" sz="2550" b="1" dirty="0" spc="-1" kern="0">
                 <a:solidFill>
                   <a:srgbClr val="F3EEE3"/>
                 </a:solidFill>
@@ -11657,7 +11646,7 @@
               </a:rPr>
               <a:t> X</a:t>
             </a:r>
-            <a:endParaRPr lang="en-US" sz="2250" dirty="0"/>
+            <a:endParaRPr lang="en-US" sz="2550" dirty="0"/>
           </a:p>
         </p:txBody>
       </p:sp>
@@ -11754,7 +11743,7 @@
               <a:buNone/>
             </a:pPr>
             <a:r>
-              <a:rPr lang="en-US" sz="2250" b="1" dirty="0" spc="-1" kern="0">
+              <a:rPr lang="en-US" sz="2550" b="1" dirty="0" spc="5" kern="0">
                 <a:solidFill>
                   <a:srgbClr val="F3EEE3"/>
                 </a:solidFill>
@@ -11765,7 +11754,7 @@
               <a:t>2.</a:t>
             </a:r>
             <a:r>
-              <a:rPr lang="en-US" sz="2250" b="1" dirty="0" spc="2" kern="0">
+              <a:rPr lang="en-US" sz="2550" b="1" dirty="0" spc="1" kern="0">
                 <a:solidFill>
                   <a:srgbClr val="F3EEE3"/>
                 </a:solidFill>
@@ -11776,7 +11765,7 @@
               <a:t> Tin</a:t>
             </a:r>
             <a:r>
-              <a:rPr lang="en-US" sz="2250" b="1" dirty="0" spc="6" kern="0">
+              <a:rPr lang="en-US" sz="2550" b="1" dirty="0" spc="-2" kern="0">
                 <a:solidFill>
                   <a:srgbClr val="F3EEE3"/>
                 </a:solidFill>
@@ -11787,7 +11776,7 @@
               <a:t> X</a:t>
             </a:r>
             <a:r>
-              <a:rPr lang="en-US" sz="2250" b="1" dirty="0" spc="11" kern="0">
+              <a:rPr lang="en-US" sz="2550" b="1" dirty="0" spc="10" kern="0">
                 <a:solidFill>
                   <a:srgbClr val="F3EEE3"/>
                 </a:solidFill>
@@ -11798,7 +11787,7 @@
               <a:t> được</a:t>
             </a:r>
             <a:r>
-              <a:rPr lang="en-US" sz="2250" b="1" dirty="0" spc="6" kern="0">
+              <a:rPr lang="en-US" sz="2550" b="1" dirty="0" spc="6" kern="0">
                 <a:solidFill>
                   <a:srgbClr val="F3EEE3"/>
                 </a:solidFill>
@@ -11809,7 +11798,7 @@
               <a:t> giao</a:t>
             </a:r>
             <a:r>
-              <a:rPr lang="en-US" sz="2250" b="1" dirty="0" spc="1" kern="0">
+              <a:rPr lang="en-US" sz="2550" b="1" dirty="0" spc="-1" kern="0">
                 <a:solidFill>
                   <a:srgbClr val="F3EEE3"/>
                 </a:solidFill>
@@ -11819,7 +11808,7 @@
               </a:rPr>
               <a:t> lại</a:t>
             </a:r>
-            <a:endParaRPr lang="en-US" sz="2250" dirty="0"/>
+            <a:endParaRPr lang="en-US" sz="2550" dirty="0"/>
           </a:p>
         </p:txBody>
       </p:sp>
@@ -13401,7 +13390,7 @@
               <a:buNone/>
             </a:pPr>
             <a:r>
-              <a:rPr lang="en-US" sz="2250" dirty="0" spc="-1" kern="0">
+              <a:rPr lang="en-US" sz="2550" dirty="0" spc="-2" kern="0">
                 <a:solidFill>
                   <a:srgbClr val="6B6A66"/>
                 </a:solidFill>
@@ -13409,10 +13398,10 @@
                 <a:ea typeface="Be Vietnam Pro" pitchFamily="34" charset="-122"/>
                 <a:cs typeface="Be Vietnam Pro" pitchFamily="34" charset="-120"/>
               </a:rPr>
-              <a:t>Kho phiên,</a:t>
-            </a:r>
-            <a:r>
-              <a:rPr lang="en-US" sz="2250" dirty="0" spc="0" kern="0">
+              <a:t>Kho</a:t>
+            </a:r>
+            <a:r>
+              <a:rPr lang="en-US" sz="2550" dirty="0" spc="-1" kern="0">
                 <a:solidFill>
                   <a:srgbClr val="6B6A66"/>
                 </a:solidFill>
@@ -13420,10 +13409,21 @@
                 <a:ea typeface="Be Vietnam Pro" pitchFamily="34" charset="-122"/>
                 <a:cs typeface="Be Vietnam Pro" pitchFamily="34" charset="-120"/>
               </a:rPr>
+              <a:t> phiên,</a:t>
+            </a:r>
+            <a:r>
+              <a:rPr lang="en-US" sz="2550" dirty="0" spc="1" kern="0">
+                <a:solidFill>
+                  <a:srgbClr val="6B6A66"/>
+                </a:solidFill>
+                <a:latin typeface="Be Vietnam Pro" pitchFamily="34" charset="0"/>
+                <a:ea typeface="Be Vietnam Pro" pitchFamily="34" charset="-122"/>
+                <a:cs typeface="Be Vietnam Pro" pitchFamily="34" charset="-120"/>
+              </a:rPr>
               <a:t> hàng</a:t>
             </a:r>
             <a:r>
-              <a:rPr lang="en-US" sz="2250" dirty="0" spc="8" kern="0">
+              <a:rPr lang="en-US" sz="2550" dirty="0" spc="9" kern="0">
                 <a:solidFill>
                   <a:srgbClr val="6B6A66"/>
                 </a:solidFill>
@@ -13434,7 +13434,7 @@
               <a:t> đợi,</a:t>
             </a:r>
             <a:r>
-              <a:rPr lang="en-US" sz="2250" dirty="0" spc="0" kern="0">
+              <a:rPr lang="en-US" sz="2550" dirty="0" spc="-1" kern="0">
                 <a:solidFill>
                   <a:srgbClr val="6B6A66"/>
                 </a:solidFill>
@@ -13445,7 +13445,7 @@
               <a:t> khóa:</a:t>
             </a:r>
             <a:r>
-              <a:rPr lang="en-US" sz="2250" dirty="0" spc="11" kern="0">
+              <a:rPr lang="en-US" sz="2550" dirty="0" spc="14" kern="0">
                 <a:solidFill>
                   <a:srgbClr val="6B6A66"/>
                 </a:solidFill>
@@ -13456,7 +13456,7 @@
               <a:t> đều</a:t>
             </a:r>
             <a:r>
-              <a:rPr lang="en-US" sz="2250" dirty="0" spc="5" kern="0">
+              <a:rPr lang="en-US" sz="2550" dirty="0" spc="0" kern="0">
                 <a:solidFill>
                   <a:srgbClr val="6B6A66"/>
                 </a:solidFill>
@@ -13467,7 +13467,7 @@
               <a:t> có</a:t>
             </a:r>
             <a:r>
-              <a:rPr lang="en-US" sz="2250" dirty="0" spc="0" kern="0">
+              <a:rPr lang="en-US" sz="2550" dirty="0" spc="1" kern="0">
                 <a:solidFill>
                   <a:srgbClr val="6B6A66"/>
                 </a:solidFill>
@@ -13475,20 +13475,9 @@
                 <a:ea typeface="Be Vietnam Pro" pitchFamily="34" charset="-122"/>
                 <a:cs typeface="Be Vietnam Pro" pitchFamily="34" charset="-120"/>
               </a:rPr>
-              <a:t> thể</a:t>
-            </a:r>
-            <a:r>
-              <a:rPr lang="en-US" sz="2250" dirty="0" spc="2" kern="0">
-                <a:solidFill>
-                  <a:srgbClr val="6B6A66"/>
-                </a:solidFill>
-                <a:latin typeface="Be Vietnam Pro" pitchFamily="34" charset="0"/>
-                <a:ea typeface="Be Vietnam Pro" pitchFamily="34" charset="-122"/>
-                <a:cs typeface="Be Vietnam Pro" pitchFamily="34" charset="-120"/>
-              </a:rPr>
-              <a:t> lỗi.</a:t>
-            </a:r>
-            <a:endParaRPr lang="en-US" sz="2250" dirty="0"/>
+              <a:t> thể lỗi.</a:t>
+            </a:r>
+            <a:endParaRPr lang="en-US" sz="2550" dirty="0"/>
           </a:p>
         </p:txBody>
       </p:sp>
@@ -15495,11 +15484,11 @@
         <p:spPr>
           <a:xfrm>
             <a:off x="914400" y="2762250"/>
-            <a:ext cx="8001000" cy="2857500"/>
+            <a:ext cx="8001000" cy="3048000"/>
           </a:xfrm>
           <a:prstGeom prst="roundRect">
             <a:avLst>
-              <a:gd name="adj" fmla="val 9333"/>
+              <a:gd name="adj" fmla="val 8750"/>
             </a:avLst>
           </a:prstGeom>
           <a:solidFill>
@@ -15581,12 +15570,12 @@
           <a:ln/>
         </p:spPr>
         <p:txBody>
-          <a:bodyPr wrap="square" lIns="0" tIns="4834" rIns="0" bIns="-4834" rtlCol="0" anchor="t"/>
+          <a:bodyPr wrap="square" lIns="0" tIns="5667" rIns="0" bIns="-5667" rtlCol="0" anchor="t"/>
           <a:lstStyle/>
           <a:p>
-            <a:pPr algn="l" marL="276225" indent="-197346">
+            <a:pPr algn="l" marL="323850" indent="-231371">
               <a:lnSpc>
-                <a:spcPts val="3045"/>
+                <a:spcPts val="3570"/>
               </a:lnSpc>
               <a:spcAft>
                 <a:spcPts val="600"/>
@@ -15596,7 +15585,7 @@
               <a:buChar char="•"/>
             </a:pPr>
             <a:r>
-              <a:rPr lang="en-US" sz="2175" dirty="0" spc="-27" kern="0">
+              <a:rPr lang="en-US" sz="2550" dirty="0" spc="-33" kern="0">
                 <a:solidFill>
                   <a:srgbClr val="E4E1D8"/>
                 </a:solidFill>
@@ -15607,7 +15596,7 @@
               <a:t>Lớp</a:t>
             </a:r>
             <a:r>
-              <a:rPr lang="en-US" sz="2175" dirty="0" spc="1" kern="0">
+              <a:rPr lang="en-US" sz="2550" dirty="0" spc="0" kern="0">
                 <a:solidFill>
                   <a:srgbClr val="E4E1D8"/>
                 </a:solidFill>
@@ -15618,7 +15607,7 @@
               <a:t> ghi</a:t>
             </a:r>
             <a:r>
-              <a:rPr lang="en-US" sz="2175" dirty="0" spc="-10" kern="0">
+              <a:rPr lang="en-US" sz="2550" dirty="0" spc="-10" kern="0">
                 <a:solidFill>
                   <a:srgbClr val="E4E1D8"/>
                 </a:solidFill>
@@ -15629,7 +15618,7 @@
               <a:t> container</a:t>
             </a:r>
             <a:r>
-              <a:rPr lang="en-US" sz="2175" dirty="0" spc="-8" kern="0">
+              <a:rPr lang="en-US" sz="2550" dirty="0" spc="-11" kern="0">
                 <a:solidFill>
                   <a:srgbClr val="E4E1D8"/>
                 </a:solidFill>
@@ -15640,7 +15629,7 @@
               <a:t> mất</a:t>
             </a:r>
             <a:r>
-              <a:rPr lang="en-US" sz="2175" dirty="0" spc="0" kern="0">
+              <a:rPr lang="en-US" sz="2550" dirty="0" spc="-1" kern="0">
                 <a:solidFill>
                   <a:srgbClr val="E4E1D8"/>
                 </a:solidFill>
@@ -15651,7 +15640,7 @@
               <a:t> khi</a:t>
             </a:r>
             <a:r>
-              <a:rPr lang="en-US" sz="2175" dirty="0" spc="-10" kern="0">
+              <a:rPr lang="en-US" sz="2550" dirty="0" spc="-10" kern="0">
                 <a:solidFill>
                   <a:srgbClr val="E4E1D8"/>
                 </a:solidFill>
@@ -15662,7 +15651,7 @@
               <a:t> container</a:t>
             </a:r>
             <a:r>
-              <a:rPr lang="en-US" sz="2175" dirty="0" spc="3" kern="0">
+              <a:rPr lang="en-US" sz="2550" dirty="0" spc="1" kern="0">
                 <a:solidFill>
                   <a:srgbClr val="E4E1D8"/>
                 </a:solidFill>
@@ -15673,7 +15662,7 @@
               <a:t> bị</a:t>
             </a:r>
             <a:r>
-              <a:rPr lang="en-US" sz="2175" dirty="0" spc="-15" kern="0">
+              <a:rPr lang="en-US" sz="2550" dirty="0" spc="-17" kern="0">
                 <a:solidFill>
                   <a:srgbClr val="E4E1D8"/>
                 </a:solidFill>
@@ -15683,12 +15672,12 @@
               </a:rPr>
               <a:t> xóa.</a:t>
             </a:r>
-            <a:endParaRPr lang="en-US" sz="2175" dirty="0"/>
+            <a:endParaRPr lang="en-US" sz="2550" dirty="0"/>
           </a:p>
           <a:p>
-            <a:pPr algn="l" marL="276225" indent="-197346">
+            <a:pPr algn="l" marL="323850" indent="-231371">
               <a:lnSpc>
-                <a:spcPts val="3045"/>
+                <a:spcPts val="3570"/>
               </a:lnSpc>
               <a:spcAft>
                 <a:spcPts val="600"/>
@@ -15698,7 +15687,7 @@
               <a:buChar char="•"/>
             </a:pPr>
             <a:r>
-              <a:rPr lang="en-US" sz="2175" dirty="0" spc="0" kern="0">
+              <a:rPr lang="en-US" sz="2550" dirty="0" spc="1" kern="0">
                 <a:solidFill>
                   <a:srgbClr val="E4E1D8"/>
                 </a:solidFill>
@@ -15709,7 +15698,7 @@
               <a:t>Phiên</a:t>
             </a:r>
             <a:r>
-              <a:rPr lang="en-US" sz="2175" dirty="0" spc="-29" kern="0">
+              <a:rPr lang="en-US" sz="2550" dirty="0" spc="-35" kern="0">
                 <a:solidFill>
                   <a:srgbClr val="E4E1D8"/>
                 </a:solidFill>
@@ -15720,7 +15709,7 @@
               <a:t> ra</a:t>
             </a:r>
             <a:r>
-              <a:rPr lang="en-US" sz="2175" dirty="0" spc="-17" kern="0">
+              <a:rPr lang="en-US" sz="2550" dirty="0" spc="-24" kern="0">
                 <a:solidFill>
                   <a:srgbClr val="E4E1D8"/>
                 </a:solidFill>
@@ -15731,7 +15720,7 @@
               <a:t> Redis</a:t>
             </a:r>
             <a:r>
-              <a:rPr lang="en-US" sz="2175" dirty="0" spc="-7" kern="0">
+              <a:rPr lang="en-US" sz="2550" dirty="0" spc="-10" kern="0">
                 <a:solidFill>
                   <a:srgbClr val="E4E1D8"/>
                 </a:solidFill>
@@ -15742,7 +15731,7 @@
               <a:t> hay</a:t>
             </a:r>
             <a:r>
-              <a:rPr lang="en-US" sz="2175" dirty="0" spc="-2" kern="0">
+              <a:rPr lang="en-US" sz="2550" dirty="0" spc="0" kern="0">
                 <a:solidFill>
                   <a:srgbClr val="E4E1D8"/>
                 </a:solidFill>
@@ -15753,7 +15742,7 @@
               <a:t> cơ</a:t>
             </a:r>
             <a:r>
-              <a:rPr lang="en-US" sz="2175" dirty="0" spc="-4" kern="0">
+              <a:rPr lang="en-US" sz="2550" dirty="0" spc="-10" kern="0">
                 <a:solidFill>
                   <a:srgbClr val="E4E1D8"/>
                 </a:solidFill>
@@ -15764,7 +15753,7 @@
               <a:t> sở</a:t>
             </a:r>
             <a:r>
-              <a:rPr lang="en-US" sz="2175" dirty="0" spc="2" kern="0">
+              <a:rPr lang="en-US" sz="2550" dirty="0" spc="-2" kern="0">
                 <a:solidFill>
                   <a:srgbClr val="E4E1D8"/>
                 </a:solidFill>
@@ -15775,7 +15764,7 @@
               <a:t> dữ</a:t>
             </a:r>
             <a:r>
-              <a:rPr lang="en-US" sz="2175" dirty="0" spc="1" kern="0">
+              <a:rPr lang="en-US" sz="2550" dirty="0" spc="2" kern="0">
                 <a:solidFill>
                   <a:srgbClr val="E4E1D8"/>
                 </a:solidFill>
@@ -15785,19 +15774,19 @@
               </a:rPr>
               <a:t> liệu.</a:t>
             </a:r>
-            <a:endParaRPr lang="en-US" sz="2175" dirty="0"/>
+            <a:endParaRPr lang="en-US" sz="2550" dirty="0"/>
           </a:p>
           <a:p>
-            <a:pPr algn="l" marL="276225" indent="-197346">
+            <a:pPr algn="l" marL="323850" indent="-231371">
               <a:lnSpc>
-                <a:spcPts val="3045"/>
+                <a:spcPts val="3570"/>
               </a:lnSpc>
               <a:buSzPct val="100000"/>
               <a:buFont typeface="Arial"/>
               <a:buChar char="•"/>
             </a:pPr>
             <a:r>
-              <a:rPr lang="en-US" sz="2175" dirty="0" spc="-63" kern="0">
+              <a:rPr lang="en-US" sz="2550" dirty="0" spc="-77" kern="0">
                 <a:solidFill>
                   <a:srgbClr val="E4E1D8"/>
                 </a:solidFill>
@@ -15808,7 +15797,7 @@
               <a:t>Tệp</a:t>
             </a:r>
             <a:r>
-              <a:rPr lang="en-US" sz="2175" dirty="0" spc="-29" kern="0">
+              <a:rPr lang="en-US" sz="2550" dirty="0" spc="-35" kern="0">
                 <a:solidFill>
                   <a:srgbClr val="E4E1D8"/>
                 </a:solidFill>
@@ -15819,7 +15808,7 @@
               <a:t> ra</a:t>
             </a:r>
             <a:r>
-              <a:rPr lang="en-US" sz="2175" dirty="0" spc="-14" kern="0">
+              <a:rPr lang="en-US" sz="2550" dirty="0" spc="-16" kern="0">
                 <a:solidFill>
                   <a:srgbClr val="E4E1D8"/>
                 </a:solidFill>
@@ -15830,7 +15819,7 @@
               <a:t> object</a:t>
             </a:r>
             <a:r>
-              <a:rPr lang="en-US" sz="2175" dirty="0" spc="-23" kern="0">
+              <a:rPr lang="en-US" sz="2550" dirty="0" spc="-28" kern="0">
                 <a:solidFill>
                   <a:srgbClr val="E4E1D8"/>
                 </a:solidFill>
@@ -15841,7 +15830,7 @@
               <a:t> storage</a:t>
             </a:r>
             <a:r>
-              <a:rPr lang="en-US" sz="2175" dirty="0" spc="-4" kern="0">
+              <a:rPr lang="en-US" sz="2550" dirty="0" spc="-3" kern="0">
                 <a:solidFill>
                   <a:srgbClr val="E4E1D8"/>
                 </a:solidFill>
@@ -15849,10 +15838,10 @@
                 <a:ea typeface="Be Vietnam Pro" pitchFamily="34" charset="-122"/>
                 <a:cs typeface="Be Vietnam Pro" pitchFamily="34" charset="-120"/>
               </a:rPr>
-              <a:t> hoặc volume</a:t>
-            </a:r>
-            <a:r>
-              <a:rPr lang="en-US" sz="2175" dirty="0" spc="0" kern="0">
+              <a:t> hoặc</a:t>
+            </a:r>
+            <a:r>
+              <a:rPr lang="en-US" sz="2550" dirty="0" spc="-7" kern="0">
                 <a:solidFill>
                   <a:srgbClr val="E4E1D8"/>
                 </a:solidFill>
@@ -15860,9 +15849,20 @@
                 <a:ea typeface="Be Vietnam Pro" pitchFamily="34" charset="-122"/>
                 <a:cs typeface="Be Vietnam Pro" pitchFamily="34" charset="-120"/>
               </a:rPr>
+              <a:t> volume</a:t>
+            </a:r>
+            <a:r>
+              <a:rPr lang="en-US" sz="2550" dirty="0" spc="2" kern="0">
+                <a:solidFill>
+                  <a:srgbClr val="E4E1D8"/>
+                </a:solidFill>
+                <a:latin typeface="Be Vietnam Pro" pitchFamily="34" charset="0"/>
+                <a:ea typeface="Be Vietnam Pro" pitchFamily="34" charset="-122"/>
+                <a:cs typeface="Be Vietnam Pro" pitchFamily="34" charset="-120"/>
+              </a:rPr>
               <a:t> chung.</a:t>
             </a:r>
-            <a:endParaRPr lang="en-US" sz="2175" dirty="0"/>
+            <a:endParaRPr lang="en-US" sz="2550" dirty="0"/>
           </a:p>
         </p:txBody>
       </p:sp>
@@ -15875,11 +15875,11 @@
         <p:spPr>
           <a:xfrm>
             <a:off x="9372600" y="2762250"/>
-            <a:ext cx="8001000" cy="2857500"/>
+            <a:ext cx="8001000" cy="3048000"/>
           </a:xfrm>
           <a:prstGeom prst="roundRect">
             <a:avLst>
-              <a:gd name="adj" fmla="val 9333"/>
+              <a:gd name="adj" fmla="val 8750"/>
             </a:avLst>
           </a:prstGeom>
           <a:solidFill>
@@ -15963,7 +15963,7 @@
         <p:spPr>
           <a:xfrm>
             <a:off x="9753600" y="3638550"/>
-            <a:ext cx="7334250" cy="1809750"/>
+            <a:ext cx="7334250" cy="2000250"/>
           </a:xfrm>
           <a:prstGeom prst="rect">
             <a:avLst/>
@@ -15972,12 +15972,12 @@
           <a:ln/>
         </p:spPr>
         <p:txBody>
-          <a:bodyPr wrap="square" lIns="0" tIns="4834" rIns="0" bIns="-4834" rtlCol="0" anchor="t"/>
+          <a:bodyPr wrap="square" lIns="0" tIns="5667" rIns="0" bIns="-5667" rtlCol="0" anchor="t"/>
           <a:lstStyle/>
           <a:p>
-            <a:pPr algn="l" marL="276225" indent="-197346">
+            <a:pPr algn="l" marL="323850" indent="-231371">
               <a:lnSpc>
-                <a:spcPts val="3045"/>
+                <a:spcPts val="3570"/>
               </a:lnSpc>
               <a:spcAft>
                 <a:spcPts val="600"/>
@@ -15987,7 +15987,7 @@
               <a:buChar char="•"/>
             </a:pPr>
             <a:r>
-              <a:rPr lang="en-US" sz="2175" dirty="0" spc="-13" kern="0">
+              <a:rPr lang="en-US" sz="2550" dirty="0" spc="-15" kern="0">
                 <a:solidFill>
                   <a:srgbClr val="E4E1D8"/>
                 </a:solidFill>
@@ -15998,7 +15998,7 @@
               <a:t>CronJob</a:t>
             </a:r>
             <a:r>
-              <a:rPr lang="en-US" sz="2175" dirty="0" spc="-12" kern="0">
+              <a:rPr lang="en-US" sz="2550" dirty="0" spc="-11" kern="0">
                 <a:solidFill>
                   <a:srgbClr val="E4E1D8"/>
                 </a:solidFill>
@@ -16009,7 +16009,7 @@
               <a:t> tạo</a:t>
             </a:r>
             <a:r>
-              <a:rPr lang="en-US" sz="2175" dirty="0" spc="0" kern="0">
+              <a:rPr lang="en-US" sz="2550" dirty="0" spc="-1" kern="0">
                 <a:solidFill>
                   <a:srgbClr val="E4E1D8"/>
                 </a:solidFill>
@@ -16017,10 +16017,10 @@
                 <a:ea typeface="Be Vietnam Pro" pitchFamily="34" charset="-122"/>
                 <a:cs typeface="Be Vietnam Pro" pitchFamily="34" charset="-120"/>
               </a:rPr>
-              <a:t> Job theo</a:t>
-            </a:r>
-            <a:r>
-              <a:rPr lang="en-US" sz="2175" dirty="0" spc="1" kern="0">
+              <a:t> Job</a:t>
+            </a:r>
+            <a:r>
+              <a:rPr lang="en-US" sz="2550" dirty="0" spc="-2" kern="0">
                 <a:solidFill>
                   <a:srgbClr val="E4E1D8"/>
                 </a:solidFill>
@@ -16028,10 +16028,21 @@
                 <a:ea typeface="Be Vietnam Pro" pitchFamily="34" charset="-122"/>
                 <a:cs typeface="Be Vietnam Pro" pitchFamily="34" charset="-120"/>
               </a:rPr>
+              <a:t> theo</a:t>
+            </a:r>
+            <a:r>
+              <a:rPr lang="en-US" sz="2550" dirty="0" spc="0" kern="0">
+                <a:solidFill>
+                  <a:srgbClr val="E4E1D8"/>
+                </a:solidFill>
+                <a:latin typeface="Be Vietnam Pro" pitchFamily="34" charset="0"/>
+                <a:ea typeface="Be Vietnam Pro" pitchFamily="34" charset="-122"/>
+                <a:cs typeface="Be Vietnam Pro" pitchFamily="34" charset="-120"/>
+              </a:rPr>
               <a:t> lịch,</a:t>
             </a:r>
             <a:r>
-              <a:rPr lang="en-US" sz="2175" dirty="0" spc="9" kern="0">
+              <a:rPr lang="en-US" sz="2550" dirty="0" spc="10" kern="0">
                 <a:solidFill>
                   <a:srgbClr val="E4E1D8"/>
                 </a:solidFill>
@@ -16042,7 +16053,7 @@
               <a:t> độc</a:t>
             </a:r>
             <a:r>
-              <a:rPr lang="en-US" sz="2175" dirty="0" spc="1" kern="0">
+              <a:rPr lang="en-US" sz="2550" dirty="0" spc="0" kern="0">
                 <a:solidFill>
                   <a:srgbClr val="E4E1D8"/>
                 </a:solidFill>
@@ -16053,7 +16064,7 @@
               <a:t> lập</a:t>
             </a:r>
             <a:r>
-              <a:rPr lang="en-US" sz="2175" dirty="0" spc="-3" kern="0">
+              <a:rPr lang="en-US" sz="2550" dirty="0" spc="-10" kern="0">
                 <a:solidFill>
                   <a:srgbClr val="E4E1D8"/>
                 </a:solidFill>
@@ -16064,7 +16075,7 @@
               <a:t> số</a:t>
             </a:r>
             <a:r>
-              <a:rPr lang="en-US" sz="2175" dirty="0" spc="-4" kern="0">
+              <a:rPr lang="en-US" sz="2550" dirty="0" spc="-3" kern="0">
                 <a:solidFill>
                   <a:srgbClr val="E4E1D8"/>
                 </a:solidFill>
@@ -16075,7 +16086,7 @@
               <a:t> bản</a:t>
             </a:r>
             <a:r>
-              <a:rPr lang="en-US" sz="2175" dirty="0" spc="-5" kern="0">
+              <a:rPr lang="en-US" sz="2550" dirty="0" spc="-5" kern="0">
                 <a:solidFill>
                   <a:srgbClr val="E4E1D8"/>
                 </a:solidFill>
@@ -16085,12 +16096,12 @@
               </a:rPr>
               <a:t> sao.</a:t>
             </a:r>
-            <a:endParaRPr lang="en-US" sz="2175" dirty="0"/>
+            <a:endParaRPr lang="en-US" sz="2550" dirty="0"/>
           </a:p>
           <a:p>
-            <a:pPr algn="l" marL="276225" indent="-197346">
+            <a:pPr algn="l" marL="323850" indent="-231371">
               <a:lnSpc>
-                <a:spcPts val="3045"/>
+                <a:spcPts val="3570"/>
               </a:lnSpc>
               <a:spcAft>
                 <a:spcPts val="600"/>
@@ -16100,7 +16111,7 @@
               <a:buChar char="•"/>
             </a:pPr>
             <a:r>
-              <a:rPr lang="en-US" sz="2175" dirty="0" spc="-14" kern="0">
+              <a:rPr lang="en-US" sz="2550" dirty="0" spc="-18" kern="0">
                 <a:solidFill>
                   <a:srgbClr val="E4E1D8"/>
                 </a:solidFill>
@@ -16111,7 +16122,7 @@
               <a:t>Forbid:</a:t>
             </a:r>
             <a:r>
-              <a:rPr lang="en-US" sz="2175" dirty="0" spc="-1" kern="0">
+              <a:rPr lang="en-US" sz="2550" dirty="0" spc="-4" kern="0">
                 <a:solidFill>
                   <a:srgbClr val="E4E1D8"/>
                 </a:solidFill>
@@ -16122,7 +16133,7 @@
               <a:t> bỏ</a:t>
             </a:r>
             <a:r>
-              <a:rPr lang="en-US" sz="2175" dirty="0" spc="11" kern="0">
+              <a:rPr lang="en-US" sz="2550" dirty="0" spc="7" kern="0">
                 <a:solidFill>
                   <a:srgbClr val="E4E1D8"/>
                 </a:solidFill>
@@ -16133,7 +16144,7 @@
               <a:t> lượt</a:t>
             </a:r>
             <a:r>
-              <a:rPr lang="en-US" sz="2175" dirty="0" spc="2" kern="0">
+              <a:rPr lang="en-US" sz="2550" dirty="0" spc="0" kern="0">
                 <a:solidFill>
                   <a:srgbClr val="E4E1D8"/>
                 </a:solidFill>
@@ -16141,10 +16152,10 @@
                 <a:ea typeface="Be Vietnam Pro" pitchFamily="34" charset="-122"/>
                 <a:cs typeface="Be Vietnam Pro" pitchFamily="34" charset="-120"/>
               </a:rPr>
-              <a:t> mới</a:t>
-            </a:r>
-            <a:r>
-              <a:rPr lang="en-US" sz="2175" dirty="0" spc="0" kern="0">
+              <a:t> mới khi</a:t>
+            </a:r>
+            <a:r>
+              <a:rPr lang="en-US" sz="2550" dirty="0" spc="7" kern="0">
                 <a:solidFill>
                   <a:srgbClr val="E4E1D8"/>
                 </a:solidFill>
@@ -16152,10 +16163,10 @@
                 <a:ea typeface="Be Vietnam Pro" pitchFamily="34" charset="-122"/>
                 <a:cs typeface="Be Vietnam Pro" pitchFamily="34" charset="-120"/>
               </a:rPr>
-              <a:t> khi</a:t>
-            </a:r>
-            <a:r>
-              <a:rPr lang="en-US" sz="2175" dirty="0" spc="10" kern="0">
+              <a:t> lượt</a:t>
+            </a:r>
+            <a:r>
+              <a:rPr lang="en-US" sz="2550" dirty="0" spc="6" kern="0">
                 <a:solidFill>
                   <a:srgbClr val="E4E1D8"/>
                 </a:solidFill>
@@ -16163,10 +16174,10 @@
                 <a:ea typeface="Be Vietnam Pro" pitchFamily="34" charset="-122"/>
                 <a:cs typeface="Be Vietnam Pro" pitchFamily="34" charset="-120"/>
               </a:rPr>
-              <a:t> lượt</a:t>
-            </a:r>
-            <a:r>
-              <a:rPr lang="en-US" sz="2175" dirty="0" spc="8" kern="0">
+              <a:t> trước chưa</a:t>
+            </a:r>
+            <a:r>
+              <a:rPr lang="en-US" sz="2550" dirty="0" spc="-12" kern="0">
                 <a:solidFill>
                   <a:srgbClr val="E4E1D8"/>
                 </a:solidFill>
@@ -16174,43 +16185,21 @@
                 <a:ea typeface="Be Vietnam Pro" pitchFamily="34" charset="-122"/>
                 <a:cs typeface="Be Vietnam Pro" pitchFamily="34" charset="-120"/>
               </a:rPr>
-              <a:t> trước</a:t>
-            </a:r>
-            <a:r>
-              <a:rPr lang="en-US" sz="2175" dirty="0" spc="6" kern="0">
-                <a:solidFill>
-                  <a:srgbClr val="E4E1D8"/>
-                </a:solidFill>
-                <a:latin typeface="Be Vietnam Pro" pitchFamily="34" charset="0"/>
-                <a:ea typeface="Be Vietnam Pro" pitchFamily="34" charset="-122"/>
-                <a:cs typeface="Be Vietnam Pro" pitchFamily="34" charset="-120"/>
-              </a:rPr>
-              <a:t> chưa</a:t>
-            </a:r>
-            <a:r>
-              <a:rPr lang="en-US" sz="2175" dirty="0" spc="-12" kern="0">
-                <a:solidFill>
-                  <a:srgbClr val="E4E1D8"/>
-                </a:solidFill>
-                <a:latin typeface="Be Vietnam Pro" pitchFamily="34" charset="0"/>
-                <a:ea typeface="Be Vietnam Pro" pitchFamily="34" charset="-122"/>
-                <a:cs typeface="Be Vietnam Pro" pitchFamily="34" charset="-120"/>
-              </a:rPr>
               <a:t> xong.</a:t>
             </a:r>
-            <a:endParaRPr lang="en-US" sz="2175" dirty="0"/>
+            <a:endParaRPr lang="en-US" sz="2550" dirty="0"/>
           </a:p>
           <a:p>
-            <a:pPr algn="l" marL="276225" indent="-197346">
+            <a:pPr algn="l" marL="323850" indent="-231371">
               <a:lnSpc>
-                <a:spcPts val="3045"/>
+                <a:spcPts val="3570"/>
               </a:lnSpc>
               <a:buSzPct val="100000"/>
               <a:buFont typeface="Arial"/>
               <a:buChar char="•"/>
             </a:pPr>
             <a:r>
-              <a:rPr lang="en-US" sz="2175" dirty="0" spc="2" kern="0">
+              <a:rPr lang="en-US" sz="2550" dirty="0" spc="0" kern="0">
                 <a:solidFill>
                   <a:srgbClr val="E4E1D8"/>
                 </a:solidFill>
@@ -16221,7 +16210,7 @@
               <a:t>Hiếm</a:t>
             </a:r>
             <a:r>
-              <a:rPr lang="en-US" sz="2175" dirty="0" spc="0" kern="0">
+              <a:rPr lang="en-US" sz="2550" dirty="0" spc="-1" kern="0">
                 <a:solidFill>
                   <a:srgbClr val="E4E1D8"/>
                 </a:solidFill>
@@ -16232,7 +16221,7 @@
               <a:t> khi</a:t>
             </a:r>
             <a:r>
-              <a:rPr lang="en-US" sz="2175" dirty="0" spc="-6" kern="0">
+              <a:rPr lang="en-US" sz="2550" dirty="0" spc="-7" kern="0">
                 <a:solidFill>
                   <a:srgbClr val="E4E1D8"/>
                 </a:solidFill>
@@ -16243,7 +16232,7 @@
               <a:t> chạy</a:t>
             </a:r>
             <a:r>
-              <a:rPr lang="en-US" sz="2175" dirty="0" spc="0" kern="0">
+              <a:rPr lang="en-US" sz="2550" dirty="0" spc="-1" kern="0">
                 <a:solidFill>
                   <a:srgbClr val="E4E1D8"/>
                 </a:solidFill>
@@ -16254,7 +16243,7 @@
               <a:t> hai</a:t>
             </a:r>
             <a:r>
-              <a:rPr lang="en-US" sz="2175" dirty="0" spc="-1" kern="0">
+              <a:rPr lang="en-US" sz="2550" dirty="0" spc="1" kern="0">
                 <a:solidFill>
                   <a:srgbClr val="E4E1D8"/>
                 </a:solidFill>
@@ -16265,7 +16254,7 @@
               <a:t> lần:</a:t>
             </a:r>
             <a:r>
-              <a:rPr lang="en-US" sz="2175" dirty="0" spc="-12" kern="0">
+              <a:rPr lang="en-US" sz="2550" dirty="0" spc="-14" kern="0">
                 <a:solidFill>
                   <a:srgbClr val="E4E1D8"/>
                 </a:solidFill>
@@ -16276,7 +16265,7 @@
               <a:t> vẫn</a:t>
             </a:r>
             <a:r>
-              <a:rPr lang="en-US" sz="2175" dirty="0" spc="-4" kern="0">
+              <a:rPr lang="en-US" sz="2550" dirty="0" spc="0" kern="0">
                 <a:solidFill>
                   <a:srgbClr val="E4E1D8"/>
                 </a:solidFill>
@@ -16287,7 +16276,7 @@
               <a:t> cần</a:t>
             </a:r>
             <a:r>
-              <a:rPr lang="en-US" sz="2175" dirty="0" spc="-8" kern="0">
+              <a:rPr lang="en-US" sz="2550" dirty="0" spc="-11" kern="0">
                 <a:solidFill>
                   <a:srgbClr val="E4E1D8"/>
                 </a:solidFill>
@@ -16297,7 +16286,7 @@
               </a:rPr>
               <a:t> idempotent.</a:t>
             </a:r>
-            <a:endParaRPr lang="en-US" sz="2175" dirty="0"/>
+            <a:endParaRPr lang="en-US" sz="2550" dirty="0"/>
           </a:p>
         </p:txBody>
       </p:sp>
@@ -16309,7 +16298,7 @@
         </p:nvSpPr>
         <p:spPr>
           <a:xfrm>
-            <a:off x="914400" y="5857875"/>
+            <a:off x="914400" y="6048375"/>
             <a:ext cx="8001000" cy="2857500"/>
           </a:xfrm>
           <a:prstGeom prst="roundRect">
@@ -16336,7 +16325,7 @@
         </p:nvSpPr>
         <p:spPr>
           <a:xfrm>
-            <a:off x="1295400" y="6105525"/>
+            <a:off x="1295400" y="6296025"/>
             <a:ext cx="7239000" cy="476250"/>
           </a:xfrm>
           <a:prstGeom prst="rect">
@@ -16386,7 +16375,7 @@
         </p:nvSpPr>
         <p:spPr>
           <a:xfrm>
-            <a:off x="1295400" y="6734175"/>
+            <a:off x="1295400" y="6924675"/>
             <a:ext cx="7334250" cy="1809750"/>
           </a:xfrm>
           <a:prstGeom prst="rect">
@@ -16396,12 +16385,12 @@
           <a:ln/>
         </p:spPr>
         <p:txBody>
-          <a:bodyPr wrap="square" lIns="0" tIns="4834" rIns="0" bIns="-4834" rtlCol="0" anchor="t"/>
+          <a:bodyPr wrap="square" lIns="0" tIns="5667" rIns="0" bIns="-5667" rtlCol="0" anchor="t"/>
           <a:lstStyle/>
           <a:p>
-            <a:pPr algn="l" marL="276225" indent="-197346">
+            <a:pPr algn="l" marL="323850" indent="-231371">
               <a:lnSpc>
-                <a:spcPts val="3045"/>
+                <a:spcPts val="3570"/>
               </a:lnSpc>
               <a:spcAft>
                 <a:spcPts val="600"/>
@@ -16411,7 +16400,7 @@
               <a:buChar char="•"/>
             </a:pPr>
             <a:r>
-              <a:rPr lang="en-US" sz="2175" dirty="0" spc="15" kern="0">
+              <a:rPr lang="en-US" sz="2550" dirty="0" spc="8" kern="0">
                 <a:solidFill>
                   <a:srgbClr val="E4E1D8"/>
                 </a:solidFill>
@@ -16422,7 +16411,7 @@
               <a:t>SQS</a:t>
             </a:r>
             <a:r>
-              <a:rPr lang="en-US" sz="2175" dirty="0" spc="-13" kern="0">
+              <a:rPr lang="en-US" sz="2550" dirty="0" spc="-18" kern="0">
                 <a:solidFill>
                   <a:srgbClr val="E4E1D8"/>
                 </a:solidFill>
@@ -16433,7 +16422,7 @@
               <a:t> Standard</a:t>
             </a:r>
             <a:r>
-              <a:rPr lang="en-US" sz="2175" dirty="0" spc="-2" kern="0">
+              <a:rPr lang="en-US" sz="2550" dirty="0" spc="0" kern="0">
                 <a:solidFill>
                   <a:srgbClr val="E4E1D8"/>
                 </a:solidFill>
@@ -16441,10 +16430,10 @@
                 <a:ea typeface="Be Vietnam Pro" pitchFamily="34" charset="-122"/>
                 <a:cs typeface="Be Vietnam Pro" pitchFamily="34" charset="-120"/>
               </a:rPr>
-              <a:t> giao</a:t>
-            </a:r>
-            <a:r>
-              <a:rPr lang="en-US" sz="2175" dirty="0" spc="1" kern="0">
+              <a:t> giao tin</a:t>
+            </a:r>
+            <a:r>
+              <a:rPr lang="en-US" sz="2550" dirty="0" spc="3" kern="0">
                 <a:solidFill>
                   <a:srgbClr val="E4E1D8"/>
                 </a:solidFill>
@@ -16452,10 +16441,10 @@
                 <a:ea typeface="Be Vietnam Pro" pitchFamily="34" charset="-122"/>
                 <a:cs typeface="Be Vietnam Pro" pitchFamily="34" charset="-120"/>
               </a:rPr>
-              <a:t> tin</a:t>
-            </a:r>
-            <a:r>
-              <a:rPr lang="en-US" sz="2175" dirty="0" spc="2" kern="0">
+              <a:t> ít</a:t>
+            </a:r>
+            <a:r>
+              <a:rPr lang="en-US" sz="2550" dirty="0" spc="-10" kern="0">
                 <a:solidFill>
                   <a:srgbClr val="E4E1D8"/>
                 </a:solidFill>
@@ -16463,10 +16452,10 @@
                 <a:ea typeface="Be Vietnam Pro" pitchFamily="34" charset="-122"/>
                 <a:cs typeface="Be Vietnam Pro" pitchFamily="34" charset="-120"/>
               </a:rPr>
-              <a:t> ít</a:t>
-            </a:r>
-            <a:r>
-              <a:rPr lang="en-US" sz="2175" dirty="0" spc="-8" kern="0">
+              <a:t> nhất</a:t>
+            </a:r>
+            <a:r>
+              <a:rPr lang="en-US" sz="2550" dirty="0" spc="-5" kern="0">
                 <a:solidFill>
                   <a:srgbClr val="E4E1D8"/>
                 </a:solidFill>
@@ -16474,10 +16463,10 @@
                 <a:ea typeface="Be Vietnam Pro" pitchFamily="34" charset="-122"/>
                 <a:cs typeface="Be Vietnam Pro" pitchFamily="34" charset="-120"/>
               </a:rPr>
-              <a:t> nhất</a:t>
-            </a:r>
-            <a:r>
-              <a:rPr lang="en-US" sz="2175" dirty="0" spc="-1" kern="0">
+              <a:t> một</a:t>
+            </a:r>
+            <a:r>
+              <a:rPr lang="en-US" sz="2550" dirty="0" spc="1" kern="0">
                 <a:solidFill>
                   <a:srgbClr val="E4E1D8"/>
                 </a:solidFill>
@@ -16485,25 +16474,14 @@
                 <a:ea typeface="Be Vietnam Pro" pitchFamily="34" charset="-122"/>
                 <a:cs typeface="Be Vietnam Pro" pitchFamily="34" charset="-120"/>
               </a:rPr>
-              <a:t> một</a:t>
-            </a:r>
-            <a:r>
-              <a:rPr lang="en-US" sz="2175" dirty="0" spc="-2" kern="0">
-                <a:solidFill>
-                  <a:srgbClr val="E4E1D8"/>
-                </a:solidFill>
-                <a:latin typeface="Be Vietnam Pro" pitchFamily="34" charset="0"/>
-                <a:ea typeface="Be Vietnam Pro" pitchFamily="34" charset="-122"/>
-                <a:cs typeface="Be Vietnam Pro" pitchFamily="34" charset="-120"/>
-              </a:rPr>
               <a:t> lần.</a:t>
             </a:r>
-            <a:endParaRPr lang="en-US" sz="2175" dirty="0"/>
+            <a:endParaRPr lang="en-US" sz="2550" dirty="0"/>
           </a:p>
           <a:p>
-            <a:pPr algn="l" marL="276225" indent="-197346">
+            <a:pPr algn="l" marL="323850" indent="-231371">
               <a:lnSpc>
-                <a:spcPts val="3045"/>
+                <a:spcPts val="3570"/>
               </a:lnSpc>
               <a:spcAft>
                 <a:spcPts val="600"/>
@@ -16513,7 +16491,7 @@
               <a:buChar char="•"/>
             </a:pPr>
             <a:r>
-              <a:rPr lang="en-US" sz="2175" dirty="0" spc="1" kern="0">
+              <a:rPr lang="en-US" sz="2550" dirty="0" spc="1" kern="0">
                 <a:solidFill>
                   <a:srgbClr val="E4E1D8"/>
                 </a:solidFill>
@@ -16521,10 +16499,10 @@
                 <a:ea typeface="Be Vietnam Pro" pitchFamily="34" charset="-122"/>
                 <a:cs typeface="Be Vietnam Pro" pitchFamily="34" charset="-120"/>
               </a:rPr>
-              <a:t>Lưu</a:t>
-            </a:r>
-            <a:r>
-              <a:rPr lang="en-US" sz="2175" dirty="0" spc="0" kern="0">
+              <a:t>Lưu mã</a:t>
+            </a:r>
+            <a:r>
+              <a:rPr lang="en-US" sz="2550" dirty="0" spc="0" kern="0">
                 <a:solidFill>
                   <a:srgbClr val="E4E1D8"/>
                 </a:solidFill>
@@ -16532,10 +16510,10 @@
                 <a:ea typeface="Be Vietnam Pro" pitchFamily="34" charset="-122"/>
                 <a:cs typeface="Be Vietnam Pro" pitchFamily="34" charset="-120"/>
               </a:rPr>
-              <a:t> mã</a:t>
-            </a:r>
-            <a:r>
-              <a:rPr lang="en-US" sz="2175" dirty="0" spc="1" kern="0">
+              <a:t> tin</a:t>
+            </a:r>
+            <a:r>
+              <a:rPr lang="en-US" sz="2550" dirty="0" spc="-1" kern="0">
                 <a:solidFill>
                   <a:srgbClr val="E4E1D8"/>
                 </a:solidFill>
@@ -16543,10 +16521,10 @@
                 <a:ea typeface="Be Vietnam Pro" pitchFamily="34" charset="-122"/>
                 <a:cs typeface="Be Vietnam Pro" pitchFamily="34" charset="-120"/>
               </a:rPr>
-              <a:t> tin</a:t>
-            </a:r>
-            <a:r>
-              <a:rPr lang="en-US" sz="2175" dirty="0" spc="-3" kern="0">
+              <a:t> cùng</a:t>
+            </a:r>
+            <a:r>
+              <a:rPr lang="en-US" sz="2550" dirty="0" spc="0" kern="0">
                 <a:solidFill>
                   <a:srgbClr val="E4E1D8"/>
                 </a:solidFill>
@@ -16554,10 +16532,10 @@
                 <a:ea typeface="Be Vietnam Pro" pitchFamily="34" charset="-122"/>
                 <a:cs typeface="Be Vietnam Pro" pitchFamily="34" charset="-120"/>
               </a:rPr>
-              <a:t> cùng</a:t>
-            </a:r>
-            <a:r>
-              <a:rPr lang="en-US" sz="2175" dirty="0" spc="-1" kern="0">
+              <a:t> giao dịch</a:t>
+            </a:r>
+            <a:r>
+              <a:rPr lang="en-US" sz="2550" dirty="0" spc="-14" kern="0">
                 <a:solidFill>
                   <a:srgbClr val="E4E1D8"/>
                 </a:solidFill>
@@ -16565,10 +16543,10 @@
                 <a:ea typeface="Be Vietnam Pro" pitchFamily="34" charset="-122"/>
                 <a:cs typeface="Be Vietnam Pro" pitchFamily="34" charset="-120"/>
               </a:rPr>
-              <a:t> giao</a:t>
-            </a:r>
-            <a:r>
-              <a:rPr lang="en-US" sz="2175" dirty="0" spc="1" kern="0">
+              <a:t> với</a:t>
+            </a:r>
+            <a:r>
+              <a:rPr lang="en-US" sz="2550" dirty="0" spc="-8" kern="0">
                 <a:solidFill>
                   <a:srgbClr val="E4E1D8"/>
                 </a:solidFill>
@@ -16576,10 +16554,10 @@
                 <a:ea typeface="Be Vietnam Pro" pitchFamily="34" charset="-122"/>
                 <a:cs typeface="Be Vietnam Pro" pitchFamily="34" charset="-120"/>
               </a:rPr>
-              <a:t> dịch</a:t>
-            </a:r>
-            <a:r>
-              <a:rPr lang="en-US" sz="2175" dirty="0" spc="-9" kern="0">
+              <a:t> thay</a:t>
+            </a:r>
+            <a:r>
+              <a:rPr lang="en-US" sz="2550" dirty="0" spc="11" kern="0">
                 <a:solidFill>
                   <a:srgbClr val="E4E1D8"/>
                 </a:solidFill>
@@ -16587,43 +16565,21 @@
                 <a:ea typeface="Be Vietnam Pro" pitchFamily="34" charset="-122"/>
                 <a:cs typeface="Be Vietnam Pro" pitchFamily="34" charset="-120"/>
               </a:rPr>
-              <a:t> với</a:t>
-            </a:r>
-            <a:r>
-              <a:rPr lang="en-US" sz="2175" dirty="0" spc="-4" kern="0">
-                <a:solidFill>
-                  <a:srgbClr val="E4E1D8"/>
-                </a:solidFill>
-                <a:latin typeface="Be Vietnam Pro" pitchFamily="34" charset="0"/>
-                <a:ea typeface="Be Vietnam Pro" pitchFamily="34" charset="-122"/>
-                <a:cs typeface="Be Vietnam Pro" pitchFamily="34" charset="-120"/>
-              </a:rPr>
-              <a:t> thay</a:t>
-            </a:r>
-            <a:r>
-              <a:rPr lang="en-US" sz="2175" dirty="0" spc="10" kern="0">
-                <a:solidFill>
-                  <a:srgbClr val="E4E1D8"/>
-                </a:solidFill>
-                <a:latin typeface="Be Vietnam Pro" pitchFamily="34" charset="0"/>
-                <a:ea typeface="Be Vietnam Pro" pitchFamily="34" charset="-122"/>
-                <a:cs typeface="Be Vietnam Pro" pitchFamily="34" charset="-120"/>
-              </a:rPr>
               <a:t> đổi.</a:t>
             </a:r>
-            <a:endParaRPr lang="en-US" sz="2175" dirty="0"/>
+            <a:endParaRPr lang="en-US" sz="2550" dirty="0"/>
           </a:p>
           <a:p>
-            <a:pPr algn="l" marL="276225" indent="-197346">
+            <a:pPr algn="l" marL="323850" indent="-231371">
               <a:lnSpc>
-                <a:spcPts val="3045"/>
+                <a:spcPts val="3570"/>
               </a:lnSpc>
               <a:buSzPct val="100000"/>
               <a:buFont typeface="Arial"/>
               <a:buChar char="•"/>
             </a:pPr>
             <a:r>
-              <a:rPr lang="en-US" sz="2175" dirty="0" spc="-29" kern="0">
+              <a:rPr lang="en-US" sz="2550" dirty="0" spc="-30" kern="0">
                 <a:solidFill>
                   <a:srgbClr val="E4E1D8"/>
                 </a:solidFill>
@@ -16634,7 +16590,7 @@
               <a:t>Ràng</a:t>
             </a:r>
             <a:r>
-              <a:rPr lang="en-US" sz="2175" dirty="0" spc="1" kern="0">
+              <a:rPr lang="en-US" sz="2550" dirty="0" spc="-2" kern="0">
                 <a:solidFill>
                   <a:srgbClr val="E4E1D8"/>
                 </a:solidFill>
@@ -16645,7 +16601,7 @@
               <a:t> buộc</a:t>
             </a:r>
             <a:r>
-              <a:rPr lang="en-US" sz="2175" dirty="0" spc="4" kern="0">
+              <a:rPr lang="en-US" sz="2550" dirty="0" spc="2" kern="0">
                 <a:solidFill>
                   <a:srgbClr val="E4E1D8"/>
                 </a:solidFill>
@@ -16656,7 +16612,7 @@
               <a:t> duy</a:t>
             </a:r>
             <a:r>
-              <a:rPr lang="en-US" sz="2175" dirty="0" spc="-8" kern="0">
+              <a:rPr lang="en-US" sz="2550" dirty="0" spc="-10" kern="0">
                 <a:solidFill>
                   <a:srgbClr val="E4E1D8"/>
                 </a:solidFill>
@@ -16667,7 +16623,7 @@
               <a:t> nhất</a:t>
             </a:r>
             <a:r>
-              <a:rPr lang="en-US" sz="2175" dirty="0" spc="-17" kern="0">
+              <a:rPr lang="en-US" sz="2550" dirty="0" spc="-19" kern="0">
                 <a:solidFill>
                   <a:srgbClr val="E4E1D8"/>
                 </a:solidFill>
@@ -16678,7 +16634,7 @@
               <a:t> trên</a:t>
             </a:r>
             <a:r>
-              <a:rPr lang="en-US" sz="2175" dirty="0" spc="1" kern="0">
+              <a:rPr lang="en-US" sz="2550" dirty="0" spc="1" kern="0">
                 <a:solidFill>
                   <a:srgbClr val="E4E1D8"/>
                 </a:solidFill>
@@ -16686,20 +16642,9 @@
                 <a:ea typeface="Be Vietnam Pro" pitchFamily="34" charset="-122"/>
                 <a:cs typeface="Be Vietnam Pro" pitchFamily="34" charset="-120"/>
               </a:rPr>
-              <a:t> mã</a:t>
-            </a:r>
-            <a:r>
-              <a:rPr lang="en-US" sz="2175" dirty="0" spc="-1" kern="0">
-                <a:solidFill>
-                  <a:srgbClr val="E4E1D8"/>
-                </a:solidFill>
-                <a:latin typeface="Be Vietnam Pro" pitchFamily="34" charset="0"/>
-                <a:ea typeface="Be Vietnam Pro" pitchFamily="34" charset="-122"/>
-                <a:cs typeface="Be Vietnam Pro" pitchFamily="34" charset="-120"/>
-              </a:rPr>
-              <a:t> tin.</a:t>
-            </a:r>
-            <a:endParaRPr lang="en-US" sz="2175" dirty="0"/>
+              <a:t> mã tin.</a:t>
+            </a:r>
+            <a:endParaRPr lang="en-US" sz="2550" dirty="0"/>
           </a:p>
         </p:txBody>
       </p:sp>
@@ -16711,7 +16656,7 @@
         </p:nvSpPr>
         <p:spPr>
           <a:xfrm>
-            <a:off x="9372600" y="5857875"/>
+            <a:off x="9372600" y="6048375"/>
             <a:ext cx="8001000" cy="2857500"/>
           </a:xfrm>
           <a:prstGeom prst="roundRect">
@@ -16738,7 +16683,7 @@
         </p:nvSpPr>
         <p:spPr>
           <a:xfrm>
-            <a:off x="9753600" y="6105525"/>
+            <a:off x="9753600" y="6296025"/>
             <a:ext cx="7239000" cy="476250"/>
           </a:xfrm>
           <a:prstGeom prst="rect">
@@ -16788,7 +16733,7 @@
         </p:nvSpPr>
         <p:spPr>
           <a:xfrm>
-            <a:off x="9753600" y="6734175"/>
+            <a:off x="9753600" y="6924675"/>
             <a:ext cx="7334250" cy="1809750"/>
           </a:xfrm>
           <a:prstGeom prst="rect">
@@ -16798,12 +16743,12 @@
           <a:ln/>
         </p:spPr>
         <p:txBody>
-          <a:bodyPr wrap="square" lIns="0" tIns="4834" rIns="0" bIns="-4834" rtlCol="0" anchor="t"/>
+          <a:bodyPr wrap="square" lIns="0" tIns="5667" rIns="0" bIns="-5667" rtlCol="0" anchor="t"/>
           <a:lstStyle/>
           <a:p>
-            <a:pPr algn="l" marL="276225" indent="-197346">
+            <a:pPr algn="l" marL="323850" indent="-231371">
               <a:lnSpc>
-                <a:spcPts val="3045"/>
+                <a:spcPts val="3570"/>
               </a:lnSpc>
               <a:spcAft>
                 <a:spcPts val="600"/>
@@ -16813,7 +16758,7 @@
               <a:buChar char="•"/>
             </a:pPr>
             <a:r>
-              <a:rPr lang="en-US" sz="2175" dirty="0" spc="-7" kern="0">
+              <a:rPr lang="en-US" sz="2550" dirty="0" spc="-9" kern="0">
                 <a:solidFill>
                   <a:srgbClr val="E4E1D8"/>
                 </a:solidFill>
@@ -16824,7 +16769,7 @@
               <a:t>Chạy</a:t>
             </a:r>
             <a:r>
-              <a:rPr lang="en-US" sz="2175" dirty="0" spc="2" kern="0">
+              <a:rPr lang="en-US" sz="2550" dirty="0" spc="-1" kern="0">
                 <a:solidFill>
                   <a:srgbClr val="E4E1D8"/>
                 </a:solidFill>
@@ -16832,10 +16777,10 @@
                 <a:ea typeface="Be Vietnam Pro" pitchFamily="34" charset="-122"/>
                 <a:cs typeface="Be Vietnam Pro" pitchFamily="34" charset="-120"/>
               </a:rPr>
-              <a:t> thử</a:t>
-            </a:r>
-            <a:r>
-              <a:rPr lang="en-US" sz="2175" dirty="0" spc="0" kern="0">
+              <a:t> thử hai,</a:t>
+            </a:r>
+            <a:r>
+              <a:rPr lang="en-US" sz="2550" dirty="0" spc="-5" kern="0">
                 <a:solidFill>
                   <a:srgbClr val="E4E1D8"/>
                 </a:solidFill>
@@ -16843,10 +16788,10 @@
                 <a:ea typeface="Be Vietnam Pro" pitchFamily="34" charset="-122"/>
                 <a:cs typeface="Be Vietnam Pro" pitchFamily="34" charset="-120"/>
               </a:rPr>
-              <a:t> hai,</a:t>
-            </a:r>
-            <a:r>
-              <a:rPr lang="en-US" sz="2175" dirty="0" spc="-3" kern="0">
+              <a:t> ba</a:t>
+            </a:r>
+            <a:r>
+              <a:rPr lang="en-US" sz="2550" dirty="0" spc="-3" kern="0">
                 <a:solidFill>
                   <a:srgbClr val="E4E1D8"/>
                 </a:solidFill>
@@ -16854,10 +16799,10 @@
                 <a:ea typeface="Be Vietnam Pro" pitchFamily="34" charset="-122"/>
                 <a:cs typeface="Be Vietnam Pro" pitchFamily="34" charset="-120"/>
               </a:rPr>
-              <a:t> ba bản</a:t>
-            </a:r>
-            <a:r>
-              <a:rPr lang="en-US" sz="2175" dirty="0" spc="-6" kern="0">
+              <a:t> bản</a:t>
+            </a:r>
+            <a:r>
+              <a:rPr lang="en-US" sz="2550" dirty="0" spc="-8" kern="0">
                 <a:solidFill>
                   <a:srgbClr val="E4E1D8"/>
                 </a:solidFill>
@@ -16868,7 +16813,7 @@
               <a:t> sao</a:t>
             </a:r>
             <a:r>
-              <a:rPr lang="en-US" sz="2175" dirty="0" spc="2" kern="0">
+              <a:rPr lang="en-US" sz="2550" dirty="0" spc="-1" kern="0">
                 <a:solidFill>
                   <a:srgbClr val="E4E1D8"/>
                 </a:solidFill>
@@ -16876,10 +16821,10 @@
                 <a:ea typeface="Be Vietnam Pro" pitchFamily="34" charset="-122"/>
                 <a:cs typeface="Be Vietnam Pro" pitchFamily="34" charset="-120"/>
               </a:rPr>
-              <a:t> ở môi</a:t>
-            </a:r>
-            <a:r>
-              <a:rPr lang="en-US" sz="2175" dirty="0" spc="7" kern="0">
+              <a:t> ở</a:t>
+            </a:r>
+            <a:r>
+              <a:rPr lang="en-US" sz="2550" dirty="0" spc="0" kern="0">
                 <a:solidFill>
                   <a:srgbClr val="E4E1D8"/>
                 </a:solidFill>
@@ -16887,10 +16832,21 @@
                 <a:ea typeface="Be Vietnam Pro" pitchFamily="34" charset="-122"/>
                 <a:cs typeface="Be Vietnam Pro" pitchFamily="34" charset="-120"/>
               </a:rPr>
+              <a:t> môi</a:t>
+            </a:r>
+            <a:r>
+              <a:rPr lang="en-US" sz="2550" dirty="0" spc="5" kern="0">
+                <a:solidFill>
+                  <a:srgbClr val="E4E1D8"/>
+                </a:solidFill>
+                <a:latin typeface="Be Vietnam Pro" pitchFamily="34" charset="0"/>
+                <a:ea typeface="Be Vietnam Pro" pitchFamily="34" charset="-122"/>
+                <a:cs typeface="Be Vietnam Pro" pitchFamily="34" charset="-120"/>
+              </a:rPr>
               <a:t> trường</a:t>
             </a:r>
             <a:r>
-              <a:rPr lang="en-US" sz="2175" dirty="0" spc="1" kern="0">
+              <a:rPr lang="en-US" sz="2550" dirty="0" spc="0" kern="0">
                 <a:solidFill>
                   <a:srgbClr val="E4E1D8"/>
                 </a:solidFill>
@@ -16900,19 +16856,19 @@
               </a:rPr>
               <a:t> thử.</a:t>
             </a:r>
-            <a:endParaRPr lang="en-US" sz="2175" dirty="0"/>
+            <a:endParaRPr lang="en-US" sz="2550" dirty="0"/>
           </a:p>
           <a:p>
-            <a:pPr algn="l" marL="276225" indent="-197346">
+            <a:pPr algn="l" marL="323850" indent="-231371">
               <a:lnSpc>
-                <a:spcPts val="3045"/>
+                <a:spcPts val="3570"/>
               </a:lnSpc>
               <a:buSzPct val="100000"/>
               <a:buFont typeface="Arial"/>
               <a:buChar char="•"/>
             </a:pPr>
             <a:r>
-              <a:rPr lang="en-US" sz="2175" dirty="0" spc="-5" kern="0">
+              <a:rPr lang="en-US" sz="2550" dirty="0" spc="-4" kern="0">
                 <a:solidFill>
                   <a:srgbClr val="E4E1D8"/>
                 </a:solidFill>
@@ -16923,7 +16879,7 @@
               <a:t>Hoặc</a:t>
             </a:r>
             <a:r>
-              <a:rPr lang="en-US" sz="2175" dirty="0" spc="-17" kern="0">
+              <a:rPr lang="en-US" sz="2550" dirty="0" spc="-22" kern="0">
                 <a:solidFill>
                   <a:srgbClr val="E4E1D8"/>
                 </a:solidFill>
@@ -16934,7 +16890,7 @@
               <a:t> xóa</a:t>
             </a:r>
             <a:r>
-              <a:rPr lang="en-US" sz="2175" dirty="0" spc="-2" kern="0">
+              <a:rPr lang="en-US" sz="2550" dirty="0" spc="-5" kern="0">
                 <a:solidFill>
                   <a:srgbClr val="E4E1D8"/>
                 </a:solidFill>
@@ -16945,7 +16901,7 @@
               <a:t> một</a:t>
             </a:r>
             <a:r>
-              <a:rPr lang="en-US" sz="2175" dirty="0" spc="-3" kern="0">
+              <a:rPr lang="en-US" sz="2550" dirty="0" spc="-3" kern="0">
                 <a:solidFill>
                   <a:srgbClr val="E4E1D8"/>
                 </a:solidFill>
@@ -16956,7 +16912,7 @@
               <a:t> bản</a:t>
             </a:r>
             <a:r>
-              <a:rPr lang="en-US" sz="2175" dirty="0" spc="-6" kern="0">
+              <a:rPr lang="en-US" sz="2550" dirty="0" spc="-8" kern="0">
                 <a:solidFill>
                   <a:srgbClr val="E4E1D8"/>
                 </a:solidFill>
@@ -16967,7 +16923,7 @@
               <a:t> sao</a:t>
             </a:r>
             <a:r>
-              <a:rPr lang="en-US" sz="2175" dirty="0" spc="5" kern="0">
+              <a:rPr lang="en-US" sz="2550" dirty="0" spc="6" kern="0">
                 <a:solidFill>
                   <a:srgbClr val="E4E1D8"/>
                 </a:solidFill>
@@ -16978,7 +16934,7 @@
               <a:t> giữa</a:t>
             </a:r>
             <a:r>
-              <a:rPr lang="en-US" sz="2175" dirty="0" spc="11" kern="0">
+              <a:rPr lang="en-US" sz="2550" dirty="0" spc="14" kern="0">
                 <a:solidFill>
                   <a:srgbClr val="E4E1D8"/>
                 </a:solidFill>
@@ -16988,7 +16944,7 @@
               </a:rPr>
               <a:t> chừng.</a:t>
             </a:r>
-            <a:endParaRPr lang="en-US" sz="2175" dirty="0"/>
+            <a:endParaRPr lang="en-US" sz="2550" dirty="0"/>
           </a:p>
         </p:txBody>
       </p:sp>

--- a/system-design-101/vi/lessons/sd-13-007/slides/sd-13-007.pptx
+++ b/system-design-101/vi/lessons/sd-13-007/slides/sd-13-007.pptx
@@ -5414,17 +5414,6 @@
               <a:t> mình</a:t>
             </a:r>
             <a:r>
-              <a:rPr lang="en-US" sz="2850" dirty="0" spc="2" kern="0">
-                <a:solidFill>
-                  <a:srgbClr val="14161C"/>
-                </a:solidFill>
-                <a:latin typeface="Be Vietnam Pro" pitchFamily="34" charset="0"/>
-                <a:ea typeface="Be Vietnam Pro" pitchFamily="34" charset="-122"/>
-                <a:cs typeface="Be Vietnam Pro" pitchFamily="34" charset="-120"/>
-              </a:rPr>
-              <a:t> là</a:t>
-            </a:r>
-            <a:r>
               <a:rPr lang="en-US" sz="2850" dirty="0" spc="0" kern="0">
                 <a:solidFill>
                   <a:srgbClr val="14161C"/>
@@ -9564,6 +9553,17 @@
               <a:t> gỡ:</a:t>
             </a:r>
             <a:r>
+              <a:rPr lang="en-US" sz="2850" dirty="0" spc="1" kern="0">
+                <a:solidFill>
+                  <a:srgbClr val="6B6A66"/>
+                </a:solidFill>
+                <a:latin typeface="Be Vietnam Pro" pitchFamily="34" charset="0"/>
+                <a:ea typeface="Be Vietnam Pro" pitchFamily="34" charset="-122"/>
+                <a:cs typeface="Be Vietnam Pro" pitchFamily="34" charset="-120"/>
+              </a:rPr>
+              <a:t> ID</a:t>
+            </a:r>
+            <a:r>
               <a:rPr lang="en-US" sz="2850" dirty="0" spc="-1" kern="0">
                 <a:solidFill>
                   <a:srgbClr val="6B6A66"/>
@@ -9572,7 +9572,40 @@
                 <a:ea typeface="Be Vietnam Pro" pitchFamily="34" charset="-122"/>
                 <a:cs typeface="Be Vietnam Pro" pitchFamily="34" charset="-120"/>
               </a:rPr>
-              <a:t> cấp</a:t>
+              <a:t> từ</a:t>
+            </a:r>
+            <a:r>
+              <a:rPr lang="en-US" sz="2850" dirty="0" spc="3" kern="0">
+                <a:solidFill>
+                  <a:srgbClr val="6B6A66"/>
+                </a:solidFill>
+                <a:latin typeface="Be Vietnam Pro" pitchFamily="34" charset="0"/>
+                <a:ea typeface="Be Vietnam Pro" pitchFamily="34" charset="-122"/>
+                <a:cs typeface="Be Vietnam Pro" pitchFamily="34" charset="-120"/>
+              </a:rPr>
+              <a:t> cơ</a:t>
+            </a:r>
+            <a:r>
+              <a:rPr lang="en-US" sz="2850" dirty="0" spc="-10" kern="0">
+                <a:solidFill>
+                  <a:srgbClr val="6B6A66"/>
+                </a:solidFill>
+                <a:latin typeface="Be Vietnam Pro" pitchFamily="34" charset="0"/>
+                <a:ea typeface="Be Vietnam Pro" pitchFamily="34" charset="-122"/>
+                <a:cs typeface="Be Vietnam Pro" pitchFamily="34" charset="-120"/>
+              </a:rPr>
+              <a:t> sở</a:t>
+            </a:r>
+            <a:r>
+              <a:rPr lang="en-US" sz="2850" dirty="0" spc="-1" kern="0">
+                <a:solidFill>
+                  <a:srgbClr val="6B6A66"/>
+                </a:solidFill>
+                <a:latin typeface="Be Vietnam Pro" pitchFamily="34" charset="0"/>
+                <a:ea typeface="Be Vietnam Pro" pitchFamily="34" charset="-122"/>
+                <a:cs typeface="Be Vietnam Pro" pitchFamily="34" charset="-120"/>
+              </a:rPr>
+              <a:t> dữ</a:t>
             </a:r>
             <a:r>
               <a:rPr lang="en-US" sz="2850" dirty="0" spc="2" kern="0">
@@ -9583,10 +9616,10 @@
                 <a:ea typeface="Be Vietnam Pro" pitchFamily="34" charset="-122"/>
                 <a:cs typeface="Be Vietnam Pro" pitchFamily="34" charset="-120"/>
               </a:rPr>
-              <a:t> ID</a:t>
-            </a:r>
-            <a:r>
-              <a:rPr lang="en-US" sz="2850" dirty="0" spc="-1" kern="0">
+              <a:t> liệu,</a:t>
+            </a:r>
+            <a:r>
+              <a:rPr lang="en-US" sz="2850" dirty="0" spc="-2" kern="0">
                 <a:solidFill>
                   <a:srgbClr val="6B6A66"/>
                 </a:solidFill>
@@ -9594,73 +9627,7 @@
                 <a:ea typeface="Be Vietnam Pro" pitchFamily="34" charset="-122"/>
                 <a:cs typeface="Be Vietnam Pro" pitchFamily="34" charset="-120"/>
               </a:rPr>
-              <a:t> từ</a:t>
-            </a:r>
-            <a:r>
-              <a:rPr lang="en-US" sz="2850" dirty="0" spc="2" kern="0">
-                <a:solidFill>
-                  <a:srgbClr val="6B6A66"/>
-                </a:solidFill>
-                <a:latin typeface="Be Vietnam Pro" pitchFamily="34" charset="0"/>
-                <a:ea typeface="Be Vietnam Pro" pitchFamily="34" charset="-122"/>
-                <a:cs typeface="Be Vietnam Pro" pitchFamily="34" charset="-120"/>
-              </a:rPr>
-              <a:t> cơ</a:t>
-            </a:r>
-            <a:r>
-              <a:rPr lang="en-US" sz="2850" dirty="0" spc="-10" kern="0">
-                <a:solidFill>
-                  <a:srgbClr val="6B6A66"/>
-                </a:solidFill>
-                <a:latin typeface="Be Vietnam Pro" pitchFamily="34" charset="0"/>
-                <a:ea typeface="Be Vietnam Pro" pitchFamily="34" charset="-122"/>
-                <a:cs typeface="Be Vietnam Pro" pitchFamily="34" charset="-120"/>
-              </a:rPr>
-              <a:t> sở</a:t>
-            </a:r>
-            <a:r>
-              <a:rPr lang="en-US" sz="2850" dirty="0" spc="0" kern="0">
-                <a:solidFill>
-                  <a:srgbClr val="6B6A66"/>
-                </a:solidFill>
-                <a:latin typeface="Be Vietnam Pro" pitchFamily="34" charset="0"/>
-                <a:ea typeface="Be Vietnam Pro" pitchFamily="34" charset="-122"/>
-                <a:cs typeface="Be Vietnam Pro" pitchFamily="34" charset="-120"/>
-              </a:rPr>
-              <a:t> dữ</a:t>
-            </a:r>
-            <a:r>
-              <a:rPr lang="en-US" sz="2850" dirty="0" spc="1" kern="0">
-                <a:solidFill>
-                  <a:srgbClr val="6B6A66"/>
-                </a:solidFill>
-                <a:latin typeface="Be Vietnam Pro" pitchFamily="34" charset="0"/>
-                <a:ea typeface="Be Vietnam Pro" pitchFamily="34" charset="-122"/>
-                <a:cs typeface="Be Vietnam Pro" pitchFamily="34" charset="-120"/>
-              </a:rPr>
-              <a:t> liệu</a:t>
-            </a:r>
-            <a:r>
-              <a:rPr lang="en-US" sz="2850" dirty="0" spc="-1" kern="0">
-                <a:solidFill>
-                  <a:srgbClr val="6B6A66"/>
-                </a:solidFill>
-                <a:latin typeface="Be Vietnam Pro" pitchFamily="34" charset="0"/>
-                <a:ea typeface="Be Vietnam Pro" pitchFamily="34" charset="-122"/>
-                <a:cs typeface="Be Vietnam Pro" pitchFamily="34" charset="-120"/>
-              </a:rPr>
               <a:t> hoặc</a:t>
-            </a:r>
-            <a:r>
-              <a:rPr lang="en-US" sz="2850" dirty="0" spc="-3" kern="0">
-                <a:solidFill>
-                  <a:srgbClr val="6B6A66"/>
-                </a:solidFill>
-                <a:latin typeface="Be Vietnam Pro" pitchFamily="34" charset="0"/>
-                <a:ea typeface="Be Vietnam Pro" pitchFamily="34" charset="-122"/>
-                <a:cs typeface="Be Vietnam Pro" pitchFamily="34" charset="-120"/>
-              </a:rPr>
-              <a:t> dùng</a:t>
             </a:r>
             <a:r>
               <a:rPr lang="en-US" sz="2850" dirty="0" spc="2" kern="0">
@@ -13040,7 +13007,7 @@
               <a:t> kho, hàng</a:t>
             </a:r>
             <a:r>
-              <a:rPr lang="en-US" sz="2700" dirty="0" spc="10" kern="0">
+              <a:rPr lang="en-US" sz="2700" dirty="0" spc="9" kern="0">
                 <a:solidFill>
                   <a:srgbClr val="14161C"/>
                 </a:solidFill>
@@ -13048,51 +13015,7 @@
                 <a:ea typeface="Be Vietnam Pro" pitchFamily="34" charset="-122"/>
                 <a:cs typeface="Be Vietnam Pro" pitchFamily="34" charset="-120"/>
               </a:rPr>
-              <a:t> đợi,</a:t>
-            </a:r>
-            <a:r>
-              <a:rPr lang="en-US" sz="2700" dirty="0" spc="0" kern="0">
-                <a:solidFill>
-                  <a:srgbClr val="14161C"/>
-                </a:solidFill>
-                <a:latin typeface="Be Vietnam Pro" pitchFamily="34" charset="0"/>
-                <a:ea typeface="Be Vietnam Pro" pitchFamily="34" charset="-122"/>
-                <a:cs typeface="Be Vietnam Pro" pitchFamily="34" charset="-120"/>
-              </a:rPr>
-              <a:t> cơ</a:t>
-            </a:r>
-            <a:r>
-              <a:rPr lang="en-US" sz="2700" dirty="0" spc="-13" kern="0">
-                <a:solidFill>
-                  <a:srgbClr val="14161C"/>
-                </a:solidFill>
-                <a:latin typeface="Be Vietnam Pro" pitchFamily="34" charset="0"/>
-                <a:ea typeface="Be Vietnam Pro" pitchFamily="34" charset="-122"/>
-                <a:cs typeface="Be Vietnam Pro" pitchFamily="34" charset="-120"/>
-              </a:rPr>
-              <a:t> sở</a:t>
-            </a:r>
-            <a:r>
-              <a:rPr lang="en-US" sz="2700" dirty="0" spc="-3" kern="0">
-                <a:solidFill>
-                  <a:srgbClr val="14161C"/>
-                </a:solidFill>
-                <a:latin typeface="Be Vietnam Pro" pitchFamily="34" charset="0"/>
-                <a:ea typeface="Be Vietnam Pro" pitchFamily="34" charset="-122"/>
-                <a:cs typeface="Be Vietnam Pro" pitchFamily="34" charset="-120"/>
-              </a:rPr>
-              <a:t> dữ</a:t>
-            </a:r>
-            <a:r>
-              <a:rPr lang="en-US" sz="2700" dirty="0" spc="-1" kern="0">
-                <a:solidFill>
-                  <a:srgbClr val="14161C"/>
-                </a:solidFill>
-                <a:latin typeface="Be Vietnam Pro" pitchFamily="34" charset="0"/>
-                <a:ea typeface="Be Vietnam Pro" pitchFamily="34" charset="-122"/>
-                <a:cs typeface="Be Vietnam Pro" pitchFamily="34" charset="-120"/>
-              </a:rPr>
-              <a:t> liệu.</a:t>
+              <a:t> đợi.</a:t>
             </a:r>
             <a:endParaRPr lang="en-US" sz="2700" dirty="0"/>
           </a:p>
@@ -13315,32 +13238,10 @@
                 <a:ea typeface="Be Vietnam Pro" pitchFamily="34" charset="-122"/>
                 <a:cs typeface="Be Vietnam Pro" pitchFamily="34" charset="-120"/>
               </a:rPr>
-              <a:t> thuộc</a:t>
-            </a:r>
-            <a:r>
-              <a:rPr lang="en-US" sz="2700" dirty="0" spc="-2" kern="0">
-                <a:solidFill>
-                  <a:srgbClr val="14161C"/>
-                </a:solidFill>
-                <a:latin typeface="Be Vietnam Pro" pitchFamily="34" charset="0"/>
-                <a:ea typeface="Be Vietnam Pro" pitchFamily="34" charset="-122"/>
-                <a:cs typeface="Be Vietnam Pro" pitchFamily="34" charset="-120"/>
-              </a:rPr>
-              <a:t> mới</a:t>
-            </a:r>
-            <a:r>
-              <a:rPr lang="en-US" sz="2700" dirty="0" spc="0" kern="0">
-                <a:solidFill>
-                  <a:srgbClr val="14161C"/>
-                </a:solidFill>
-                <a:latin typeface="Be Vietnam Pro" pitchFamily="34" charset="0"/>
-                <a:ea typeface="Be Vietnam Pro" pitchFamily="34" charset="-122"/>
-                <a:cs typeface="Be Vietnam Pro" pitchFamily="34" charset="-120"/>
-              </a:rPr>
-              <a:t> cần</a:t>
-            </a:r>
-            <a:r>
-              <a:rPr lang="en-US" sz="2700" dirty="0" spc="-14" kern="0">
+              <a:t> thuộc cần</a:t>
+            </a:r>
+            <a:r>
+              <a:rPr lang="en-US" sz="2700" dirty="0" spc="-13" kern="0">
                 <a:solidFill>
                   <a:srgbClr val="14161C"/>
                 </a:solidFill>
@@ -14675,7 +14576,7 @@
                 <a:ea typeface="Be Vietnam Pro" pitchFamily="34" charset="-122"/>
                 <a:cs typeface="Be Vietnam Pro" pitchFamily="34" charset="-120"/>
               </a:rPr>
-              <a:t> kho dùng</a:t>
+              <a:t> kho</a:t>
             </a:r>
             <a:r>
               <a:rPr lang="en-US" sz="2700" dirty="0" spc="1" kern="0">
@@ -14808,39 +14709,6 @@
                 <a:cs typeface="Be Vietnam Pro" pitchFamily="34" charset="-120"/>
               </a:rPr>
               <a:t> chứng;</a:t>
-            </a:r>
-            <a:r>
-              <a:rPr lang="en-US" sz="2700" dirty="0" spc="-9" kern="0">
-                <a:solidFill>
-                  <a:srgbClr val="14161C"/>
-                </a:solidFill>
-                <a:latin typeface="Be Vietnam Pro" pitchFamily="34" charset="0"/>
-                <a:ea typeface="Be Vietnam Pro" pitchFamily="34" charset="-122"/>
-                <a:cs typeface="Be Vietnam Pro" pitchFamily="34" charset="-120"/>
-              </a:rPr>
-              <a:t> thay</a:t>
-            </a:r>
-            <a:r>
-              <a:rPr lang="en-US" sz="2700" dirty="0" spc="-6" kern="0">
-                <a:solidFill>
-                  <a:srgbClr val="14161C"/>
-                </a:solidFill>
-                <a:latin typeface="Be Vietnam Pro" pitchFamily="34" charset="0"/>
-                <a:ea typeface="Be Vietnam Pro" pitchFamily="34" charset="-122"/>
-                <a:cs typeface="Be Vietnam Pro" pitchFamily="34" charset="-120"/>
-              </a:rPr>
-              <a:t> bản</a:t>
-            </a:r>
-            <a:r>
-              <a:rPr lang="en-US" sz="2700" dirty="0" spc="-10" kern="0">
-                <a:solidFill>
-                  <a:srgbClr val="14161C"/>
-                </a:solidFill>
-                <a:latin typeface="Be Vietnam Pro" pitchFamily="34" charset="0"/>
-                <a:ea typeface="Be Vietnam Pro" pitchFamily="34" charset="-122"/>
-                <a:cs typeface="Be Vietnam Pro" pitchFamily="34" charset="-120"/>
-              </a:rPr>
-              <a:t> sao</a:t>
             </a:r>
             <a:r>
               <a:rPr lang="en-US" sz="2700" dirty="0" spc="-14" kern="0">

--- a/system-design-101/vi/lessons/sd-13-007/slides/sd-13-007.pptx
+++ b/system-design-101/vi/lessons/sd-13-007/slides/sd-13-007.pptx
@@ -8027,7 +8027,7 @@
               <a:buNone/>
             </a:pPr>
             <a:r>
-              <a:rPr lang="en-US" sz="2400" b="1" dirty="0" spc="3" kern="0">
+              <a:rPr lang="en-US" sz="2550" b="1" dirty="0" spc="2" kern="0">
                 <a:solidFill>
                   <a:srgbClr val="14161C"/>
                 </a:solidFill>
@@ -8038,7 +8038,7 @@
               <a:t>Bản</a:t>
             </a:r>
             <a:r>
-              <a:rPr lang="en-US" sz="2400" b="1" dirty="0" spc="4" kern="0">
+              <a:rPr lang="en-US" sz="2550" b="1" dirty="0" spc="1" kern="0">
                 <a:solidFill>
                   <a:srgbClr val="14161C"/>
                 </a:solidFill>
@@ -8049,7 +8049,7 @@
               <a:t> sao</a:t>
             </a:r>
             <a:r>
-              <a:rPr lang="en-US" sz="2400" b="1" dirty="0" spc="0" kern="0">
+              <a:rPr lang="en-US" sz="2550" b="1" dirty="0" spc="-1" kern="0">
                 <a:solidFill>
                   <a:srgbClr val="14161C"/>
                 </a:solidFill>
@@ -8059,7 +8059,7 @@
               </a:rPr>
               <a:t> A</a:t>
             </a:r>
-            <a:endParaRPr lang="en-US" sz="2400" dirty="0"/>
+            <a:endParaRPr lang="en-US" sz="2550" dirty="0"/>
           </a:p>
         </p:txBody>
       </p:sp>
@@ -8122,7 +8122,7 @@
               <a:buNone/>
             </a:pPr>
             <a:r>
-              <a:rPr lang="en-US" sz="2400" b="1" dirty="0" spc="-13" kern="0">
+              <a:rPr lang="en-US" sz="2550" b="1" dirty="0" spc="-11" kern="0">
                 <a:solidFill>
                   <a:srgbClr val="1F3FD1"/>
                 </a:solidFill>
@@ -8133,7 +8133,7 @@
               <a:t>Chạy</a:t>
             </a:r>
             <a:r>
-              <a:rPr lang="en-US" sz="2400" b="1" dirty="0" spc="-3" kern="0">
+              <a:rPr lang="en-US" sz="2550" b="1" dirty="0" spc="0" kern="0">
                 <a:solidFill>
                   <a:srgbClr val="1F3FD1"/>
                 </a:solidFill>
@@ -8143,7 +8143,7 @@
               </a:rPr>
               <a:t> việc</a:t>
             </a:r>
-            <a:endParaRPr lang="en-US" sz="2400" dirty="0"/>
+            <a:endParaRPr lang="en-US" sz="2550" dirty="0"/>
           </a:p>
         </p:txBody>
       </p:sp>
@@ -8176,7 +8176,7 @@
               <a:buNone/>
             </a:pPr>
             <a:r>
-              <a:rPr lang="en-US" sz="2400" b="1" dirty="0" spc="3" kern="0">
+              <a:rPr lang="en-US" sz="2550" b="1" dirty="0" spc="2" kern="0">
                 <a:solidFill>
                   <a:srgbClr val="14161C"/>
                 </a:solidFill>
@@ -8187,7 +8187,7 @@
               <a:t>Bản</a:t>
             </a:r>
             <a:r>
-              <a:rPr lang="en-US" sz="2400" b="1" dirty="0" spc="4" kern="0">
+              <a:rPr lang="en-US" sz="2550" b="1" dirty="0" spc="1" kern="0">
                 <a:solidFill>
                   <a:srgbClr val="14161C"/>
                 </a:solidFill>
@@ -8198,7 +8198,7 @@
               <a:t> sao</a:t>
             </a:r>
             <a:r>
-              <a:rPr lang="en-US" sz="2400" b="1" dirty="0" spc="3" kern="0">
+              <a:rPr lang="en-US" sz="2550" b="1" dirty="0" spc="-3" kern="0">
                 <a:solidFill>
                   <a:srgbClr val="14161C"/>
                 </a:solidFill>
@@ -8208,7 +8208,7 @@
               </a:rPr>
               <a:t> B</a:t>
             </a:r>
-            <a:endParaRPr lang="en-US" sz="2400" dirty="0"/>
+            <a:endParaRPr lang="en-US" sz="2550" dirty="0"/>
           </a:p>
         </p:txBody>
       </p:sp>
@@ -8271,7 +8271,7 @@
               <a:buNone/>
             </a:pPr>
             <a:r>
-              <a:rPr lang="en-US" sz="2400" b="1" dirty="0" spc="-13" kern="0">
+              <a:rPr lang="en-US" sz="2550" b="1" dirty="0" spc="-11" kern="0">
                 <a:solidFill>
                   <a:srgbClr val="1F3FD1"/>
                 </a:solidFill>
@@ -8282,7 +8282,7 @@
               <a:t>Chạy</a:t>
             </a:r>
             <a:r>
-              <a:rPr lang="en-US" sz="2400" b="1" dirty="0" spc="-3" kern="0">
+              <a:rPr lang="en-US" sz="2550" b="1" dirty="0" spc="0" kern="0">
                 <a:solidFill>
                   <a:srgbClr val="1F3FD1"/>
                 </a:solidFill>
@@ -8292,7 +8292,7 @@
               </a:rPr>
               <a:t> việc</a:t>
             </a:r>
-            <a:endParaRPr lang="en-US" sz="2400" dirty="0"/>
+            <a:endParaRPr lang="en-US" sz="2550" dirty="0"/>
           </a:p>
         </p:txBody>
       </p:sp>
@@ -8325,7 +8325,7 @@
               <a:buNone/>
             </a:pPr>
             <a:r>
-              <a:rPr lang="en-US" sz="2400" b="1" dirty="0" spc="3" kern="0">
+              <a:rPr lang="en-US" sz="2550" b="1" dirty="0" spc="2" kern="0">
                 <a:solidFill>
                   <a:srgbClr val="14161C"/>
                 </a:solidFill>
@@ -8336,7 +8336,7 @@
               <a:t>Bản</a:t>
             </a:r>
             <a:r>
-              <a:rPr lang="en-US" sz="2400" b="1" dirty="0" spc="4" kern="0">
+              <a:rPr lang="en-US" sz="2550" b="1" dirty="0" spc="1" kern="0">
                 <a:solidFill>
                   <a:srgbClr val="14161C"/>
                 </a:solidFill>
@@ -8347,7 +8347,7 @@
               <a:t> sao</a:t>
             </a:r>
             <a:r>
-              <a:rPr lang="en-US" sz="2400" b="1" dirty="0" spc="0" kern="0">
+              <a:rPr lang="en-US" sz="2550" b="1" dirty="0" spc="0" kern="0">
                 <a:solidFill>
                   <a:srgbClr val="14161C"/>
                 </a:solidFill>
@@ -8357,7 +8357,7 @@
               </a:rPr>
               <a:t> C</a:t>
             </a:r>
-            <a:endParaRPr lang="en-US" sz="2400" dirty="0"/>
+            <a:endParaRPr lang="en-US" sz="2550" dirty="0"/>
           </a:p>
         </p:txBody>
       </p:sp>
@@ -8420,7 +8420,7 @@
               <a:buNone/>
             </a:pPr>
             <a:r>
-              <a:rPr lang="en-US" sz="2400" b="1" dirty="0" spc="-13" kern="0">
+              <a:rPr lang="en-US" sz="2550" b="1" dirty="0" spc="-11" kern="0">
                 <a:solidFill>
                   <a:srgbClr val="1F3FD1"/>
                 </a:solidFill>
@@ -8431,7 +8431,7 @@
               <a:t>Chạy</a:t>
             </a:r>
             <a:r>
-              <a:rPr lang="en-US" sz="2400" b="1" dirty="0" spc="-3" kern="0">
+              <a:rPr lang="en-US" sz="2550" b="1" dirty="0" spc="0" kern="0">
                 <a:solidFill>
                   <a:srgbClr val="1F3FD1"/>
                 </a:solidFill>
@@ -8441,7 +8441,7 @@
               </a:rPr>
               <a:t> việc</a:t>
             </a:r>
-            <a:endParaRPr lang="en-US" sz="2400" dirty="0"/>
+            <a:endParaRPr lang="en-US" sz="2550" dirty="0"/>
           </a:p>
         </p:txBody>
       </p:sp>
@@ -11380,7 +11380,7 @@
               <a:buNone/>
             </a:pPr>
             <a:r>
-              <a:rPr lang="en-US" sz="2400" b="1" dirty="0" spc="-8" kern="0">
+              <a:rPr lang="en-US" sz="2550" b="1" dirty="0" spc="-3" kern="0">
                 <a:solidFill>
                   <a:srgbClr val="14161C"/>
                 </a:solidFill>
@@ -11391,7 +11391,7 @@
               <a:t>Hàng</a:t>
             </a:r>
             <a:r>
-              <a:rPr lang="en-US" sz="2400" b="1" dirty="0" spc="12" kern="0">
+              <a:rPr lang="en-US" sz="2550" b="1" dirty="0" spc="11" kern="0">
                 <a:solidFill>
                   <a:srgbClr val="14161C"/>
                 </a:solidFill>
@@ -11401,7 +11401,7 @@
               </a:rPr>
               <a:t> đợi</a:t>
             </a:r>
-            <a:endParaRPr lang="en-US" sz="2400" dirty="0"/>
+            <a:endParaRPr lang="en-US" sz="2550" dirty="0"/>
           </a:p>
         </p:txBody>
       </p:sp>
@@ -11439,7 +11439,7 @@
               <a:buNone/>
             </a:pPr>
             <a:r>
-              <a:rPr lang="en-US" sz="2400" b="1" dirty="0" spc="3" kern="0">
+              <a:rPr lang="en-US" sz="2550" b="1" dirty="0" spc="2" kern="0">
                 <a:solidFill>
                   <a:srgbClr val="F3EEE3"/>
                 </a:solidFill>
@@ -11450,7 +11450,7 @@
               <a:t>Bản</a:t>
             </a:r>
             <a:r>
-              <a:rPr lang="en-US" sz="2400" b="1" dirty="0" spc="4" kern="0">
+              <a:rPr lang="en-US" sz="2550" b="1" dirty="0" spc="1" kern="0">
                 <a:solidFill>
                   <a:srgbClr val="F3EEE3"/>
                 </a:solidFill>
@@ -11461,7 +11461,7 @@
               <a:t> sao</a:t>
             </a:r>
             <a:r>
-              <a:rPr lang="en-US" sz="2400" b="1" dirty="0" spc="0" kern="0">
+              <a:rPr lang="en-US" sz="2550" b="1" dirty="0" spc="-1" kern="0">
                 <a:solidFill>
                   <a:srgbClr val="F3EEE3"/>
                 </a:solidFill>
@@ -11471,7 +11471,7 @@
               </a:rPr>
               <a:t> A</a:t>
             </a:r>
-            <a:endParaRPr lang="en-US" sz="2400" dirty="0"/>
+            <a:endParaRPr lang="en-US" sz="2550" dirty="0"/>
           </a:p>
         </p:txBody>
       </p:sp>
@@ -11509,7 +11509,7 @@
               <a:buNone/>
             </a:pPr>
             <a:r>
-              <a:rPr lang="en-US" sz="2400" b="1" dirty="0" spc="3" kern="0">
+              <a:rPr lang="en-US" sz="2550" b="1" dirty="0" spc="2" kern="0">
                 <a:solidFill>
                   <a:srgbClr val="F3EEE3"/>
                 </a:solidFill>
@@ -11520,7 +11520,7 @@
               <a:t>Bản</a:t>
             </a:r>
             <a:r>
-              <a:rPr lang="en-US" sz="2400" b="1" dirty="0" spc="4" kern="0">
+              <a:rPr lang="en-US" sz="2550" b="1" dirty="0" spc="1" kern="0">
                 <a:solidFill>
                   <a:srgbClr val="F3EEE3"/>
                 </a:solidFill>
@@ -11531,7 +11531,7 @@
               <a:t> sao</a:t>
             </a:r>
             <a:r>
-              <a:rPr lang="en-US" sz="2400" b="1" dirty="0" spc="3" kern="0">
+              <a:rPr lang="en-US" sz="2550" b="1" dirty="0" spc="-3" kern="0">
                 <a:solidFill>
                   <a:srgbClr val="F3EEE3"/>
                 </a:solidFill>
@@ -11541,7 +11541,7 @@
               </a:rPr>
               <a:t> B</a:t>
             </a:r>
-            <a:endParaRPr lang="en-US" sz="2400" dirty="0"/>
+            <a:endParaRPr lang="en-US" sz="2550" dirty="0"/>
           </a:p>
         </p:txBody>
       </p:sp>
@@ -14016,7 +14016,7 @@
               <a:buNone/>
             </a:pPr>
             <a:r>
-              <a:rPr lang="en-US" sz="2400" b="1" dirty="0" spc="-23" kern="0">
+              <a:rPr lang="en-US" sz="2550" b="1" dirty="0" spc="-23" kern="0">
                 <a:solidFill>
                   <a:srgbClr val="14161C"/>
                 </a:solidFill>
@@ -14027,7 +14027,7 @@
               <a:t>Request</a:t>
             </a:r>
             <a:r>
-              <a:rPr lang="en-US" sz="2400" b="1" dirty="0" spc="10" kern="0">
+              <a:rPr lang="en-US" sz="2550" b="1" dirty="0" spc="8" kern="0">
                 <a:solidFill>
                   <a:srgbClr val="14161C"/>
                 </a:solidFill>
@@ -14037,7 +14037,7 @@
               </a:rPr>
               <a:t> đầu</a:t>
             </a:r>
-            <a:endParaRPr lang="en-US" sz="2400" dirty="0"/>
+            <a:endParaRPr lang="en-US" sz="2550" dirty="0"/>
           </a:p>
         </p:txBody>
       </p:sp>
@@ -14100,7 +14100,7 @@
               <a:buNone/>
             </a:pPr>
             <a:r>
-              <a:rPr lang="en-US" sz="2400" b="1" dirty="0" spc="3" kern="0">
+              <a:rPr lang="en-US" sz="2550" b="1" dirty="0" spc="2" kern="0">
                 <a:solidFill>
                   <a:srgbClr val="14161C"/>
                 </a:solidFill>
@@ -14111,7 +14111,7 @@
               <a:t>Bản</a:t>
             </a:r>
             <a:r>
-              <a:rPr lang="en-US" sz="2400" b="1" dirty="0" spc="4" kern="0">
+              <a:rPr lang="en-US" sz="2550" b="1" dirty="0" spc="1" kern="0">
                 <a:solidFill>
                   <a:srgbClr val="14161C"/>
                 </a:solidFill>
@@ -14122,7 +14122,7 @@
               <a:t> sao</a:t>
             </a:r>
             <a:r>
-              <a:rPr lang="en-US" sz="2400" b="1" dirty="0" spc="0" kern="0">
+              <a:rPr lang="en-US" sz="2550" b="1" dirty="0" spc="-1" kern="0">
                 <a:solidFill>
                   <a:srgbClr val="14161C"/>
                 </a:solidFill>
@@ -14133,7 +14133,7 @@
               <a:t> A</a:t>
             </a:r>
             <a:r>
-              <a:rPr lang="en-US" sz="2400" b="1" dirty="0" spc="1" kern="0">
+              <a:rPr lang="en-US" sz="2550" b="1" dirty="0" spc="1" kern="0">
                 <a:solidFill>
                   <a:srgbClr val="14161C"/>
                 </a:solidFill>
@@ -14144,7 +14144,7 @@
               <a:t> tạo</a:t>
             </a:r>
             <a:r>
-              <a:rPr lang="en-US" sz="2400" b="1" dirty="0" spc="-6" kern="0">
+              <a:rPr lang="en-US" sz="2550" b="1" dirty="0" spc="-4" kern="0">
                 <a:solidFill>
                   <a:srgbClr val="14161C"/>
                 </a:solidFill>
@@ -14154,7 +14154,7 @@
               </a:rPr>
               <a:t> phiên</a:t>
             </a:r>
-            <a:endParaRPr lang="en-US" sz="2400" dirty="0"/>
+            <a:endParaRPr lang="en-US" sz="2550" dirty="0"/>
           </a:p>
         </p:txBody>
       </p:sp>
@@ -14187,7 +14187,7 @@
               <a:buNone/>
             </a:pPr>
             <a:r>
-              <a:rPr lang="en-US" sz="2400" b="1" dirty="0" spc="-23" kern="0">
+              <a:rPr lang="en-US" sz="2550" b="1" dirty="0" spc="-23" kern="0">
                 <a:solidFill>
                   <a:srgbClr val="14161C"/>
                 </a:solidFill>
@@ -14198,7 +14198,7 @@
               <a:t>Request</a:t>
             </a:r>
             <a:r>
-              <a:rPr lang="en-US" sz="2400" b="1" dirty="0" spc="2" kern="0">
+              <a:rPr lang="en-US" sz="2550" b="1" dirty="0" spc="1" kern="0">
                 <a:solidFill>
                   <a:srgbClr val="14161C"/>
                 </a:solidFill>
@@ -14208,7 +14208,7 @@
               </a:rPr>
               <a:t> sau</a:t>
             </a:r>
-            <a:endParaRPr lang="en-US" sz="2400" dirty="0"/>
+            <a:endParaRPr lang="en-US" sz="2550" dirty="0"/>
           </a:p>
         </p:txBody>
       </p:sp>
@@ -14271,7 +14271,7 @@
               <a:buNone/>
             </a:pPr>
             <a:r>
-              <a:rPr lang="en-US" sz="2400" b="1" dirty="0" spc="3" kern="0">
+              <a:rPr lang="en-US" sz="2550" b="1" dirty="0" spc="2" kern="0">
                 <a:solidFill>
                   <a:srgbClr val="14161C"/>
                 </a:solidFill>
@@ -14282,7 +14282,7 @@
               <a:t>Bản</a:t>
             </a:r>
             <a:r>
-              <a:rPr lang="en-US" sz="2400" b="1" dirty="0" spc="4" kern="0">
+              <a:rPr lang="en-US" sz="2550" b="1" dirty="0" spc="1" kern="0">
                 <a:solidFill>
                   <a:srgbClr val="14161C"/>
                 </a:solidFill>
@@ -14293,7 +14293,7 @@
               <a:t> sao</a:t>
             </a:r>
             <a:r>
-              <a:rPr lang="en-US" sz="2400" b="1" dirty="0" spc="3" kern="0">
+              <a:rPr lang="en-US" sz="2550" b="1" dirty="0" spc="-3" kern="0">
                 <a:solidFill>
                   <a:srgbClr val="14161C"/>
                 </a:solidFill>
@@ -14304,7 +14304,7 @@
               <a:t> B</a:t>
             </a:r>
             <a:r>
-              <a:rPr lang="en-US" sz="2400" b="1" dirty="0" spc="-8" kern="0">
+              <a:rPr lang="en-US" sz="2550" b="1" dirty="0" spc="-6" kern="0">
                 <a:solidFill>
                   <a:srgbClr val="14161C"/>
                 </a:solidFill>
@@ -14315,7 +14315,7 @@
               <a:t> không</a:t>
             </a:r>
             <a:r>
-              <a:rPr lang="en-US" sz="2400" b="1" dirty="0" spc="-5" kern="0">
+              <a:rPr lang="en-US" sz="2550" b="1" dirty="0" spc="-2" kern="0">
                 <a:solidFill>
                   <a:srgbClr val="14161C"/>
                 </a:solidFill>
@@ -14326,7 +14326,7 @@
               <a:t> biết</a:t>
             </a:r>
             <a:r>
-              <a:rPr lang="en-US" sz="2400" b="1" dirty="0" spc="-6" kern="0">
+              <a:rPr lang="en-US" sz="2550" b="1" dirty="0" spc="-4" kern="0">
                 <a:solidFill>
                   <a:srgbClr val="14161C"/>
                 </a:solidFill>
@@ -14336,7 +14336,7 @@
               </a:rPr>
               <a:t> phiên</a:t>
             </a:r>
-            <a:endParaRPr lang="en-US" sz="2400" dirty="0"/>
+            <a:endParaRPr lang="en-US" sz="2550" dirty="0"/>
           </a:p>
         </p:txBody>
       </p:sp>

--- a/system-design-101/vi/lessons/sd-13-007/slides/sd-13-007.pptx
+++ b/system-design-101/vi/lessons/sd-13-007/slides/sd-13-007.pptx
@@ -9679,12 +9679,12 @@
                     <a:p>
                       <a:pPr algn="l" indent="0" marL="0">
                         <a:lnSpc>
-                          <a:spcPts val="2880"/>
+                          <a:spcPts val="3060"/>
                         </a:lnSpc>
                         <a:buNone/>
                       </a:pPr>
                       <a:r>
-                        <a:rPr lang="en-US" sz="2400" b="1" dirty="0" spc="2" kern="0">
+                        <a:rPr lang="en-US" sz="2550" b="1" dirty="0" spc="6" kern="0">
                           <a:solidFill>
                             <a:srgbClr val="14161C"/>
                           </a:solidFill>
@@ -9695,7 +9695,7 @@
                         <a:t>Cách</a:t>
                       </a:r>
                       <a:r>
-                        <a:rPr lang="en-US" sz="2400" b="1" dirty="0" spc="-1" kern="0">
+                        <a:rPr lang="en-US" sz="2550" b="1" dirty="0" spc="0" kern="0">
                           <a:solidFill>
                             <a:srgbClr val="14161C"/>
                           </a:solidFill>
@@ -9706,7 +9706,7 @@
                         <a:t> sinh</a:t>
                       </a:r>
                       <a:r>
-                        <a:rPr lang="en-US" sz="2400" b="1" dirty="0" spc="1" kern="0">
+                        <a:rPr lang="en-US" sz="2550" b="1" dirty="0" spc="1" kern="0">
                           <a:solidFill>
                             <a:srgbClr val="14161C"/>
                           </a:solidFill>
@@ -9744,12 +9744,12 @@
                     <a:p>
                       <a:pPr algn="l" indent="0" marL="0">
                         <a:lnSpc>
-                          <a:spcPts val="2880"/>
+                          <a:spcPts val="3060"/>
                         </a:lnSpc>
                         <a:buNone/>
                       </a:pPr>
                       <a:r>
-                        <a:rPr lang="en-US" sz="2400" b="1" dirty="0" spc="-1" kern="0">
+                        <a:rPr lang="en-US" sz="2550" b="1" dirty="0" spc="0" kern="0">
                           <a:solidFill>
                             <a:srgbClr val="14161C"/>
                           </a:solidFill>
@@ -9760,7 +9760,7 @@
                         <a:t>Duy</a:t>
                       </a:r>
                       <a:r>
-                        <a:rPr lang="en-US" sz="2400" b="1" dirty="0" spc="-7" kern="0">
+                        <a:rPr lang="en-US" sz="2550" b="1" dirty="0" spc="-6" kern="0">
                           <a:solidFill>
                             <a:srgbClr val="14161C"/>
                           </a:solidFill>
@@ -9771,7 +9771,7 @@
                         <a:t> nhất</a:t>
                       </a:r>
                       <a:r>
-                        <a:rPr lang="en-US" sz="2400" b="1" dirty="0" spc="-13" kern="0">
+                        <a:rPr lang="en-US" sz="2550" b="1" dirty="0" spc="-13" kern="0">
                           <a:solidFill>
                             <a:srgbClr val="14161C"/>
                           </a:solidFill>
@@ -9815,12 +9815,12 @@
                     <a:p>
                       <a:pPr algn="l" indent="0" marL="0">
                         <a:lnSpc>
-                          <a:spcPts val="2880"/>
+                          <a:spcPts val="3060"/>
                         </a:lnSpc>
                         <a:buNone/>
                       </a:pPr>
                       <a:r>
-                        <a:rPr lang="en-US" sz="2400" b="1" dirty="0" spc="0" kern="0">
+                        <a:rPr lang="en-US" sz="2550" b="1" dirty="0" spc="3" kern="0">
                           <a:solidFill>
                             <a:srgbClr val="14161C"/>
                           </a:solidFill>
@@ -9831,7 +9831,7 @@
                         <a:t>Đánh</a:t>
                       </a:r>
                       <a:r>
-                        <a:rPr lang="en-US" sz="2400" b="1" dirty="0" spc="7" kern="0">
+                        <a:rPr lang="en-US" sz="2550" b="1" dirty="0" spc="5" kern="0">
                           <a:solidFill>
                             <a:srgbClr val="14161C"/>
                           </a:solidFill>
@@ -9877,12 +9877,12 @@
                     <a:p>
                       <a:pPr algn="l" indent="0" marL="0">
                         <a:lnSpc>
-                          <a:spcPts val="2880"/>
+                          <a:spcPts val="3060"/>
                         </a:lnSpc>
                         <a:buNone/>
                       </a:pPr>
                       <a:r>
-                        <a:rPr lang="en-US" sz="2400" dirty="0" spc="4" kern="0">
+                        <a:rPr lang="en-US" sz="2550" dirty="0" spc="3" kern="0">
                           <a:solidFill>
                             <a:srgbClr val="14161C"/>
                           </a:solidFill>
@@ -9893,7 +9893,7 @@
                         <a:t>Bộ</a:t>
                       </a:r>
                       <a:r>
-                        <a:rPr lang="en-US" sz="2400" dirty="0" spc="14" kern="0">
+                        <a:rPr lang="en-US" sz="2550" dirty="0" spc="14" kern="0">
                           <a:solidFill>
                             <a:srgbClr val="14161C"/>
                           </a:solidFill>
@@ -9904,7 +9904,7 @@
                         <a:t> đếm</a:t>
                       </a:r>
                       <a:r>
-                        <a:rPr lang="en-US" sz="2400" dirty="0" spc="-13" kern="0">
+                        <a:rPr lang="en-US" sz="2550" dirty="0" spc="-17" kern="0">
                           <a:solidFill>
                             <a:srgbClr val="14161C"/>
                           </a:solidFill>
@@ -9915,7 +9915,7 @@
                         <a:t> trong</a:t>
                       </a:r>
                       <a:r>
-                        <a:rPr lang="en-US" sz="2400" dirty="0" spc="-2" kern="0">
+                        <a:rPr lang="en-US" sz="2550" dirty="0" spc="-4" kern="0">
                           <a:solidFill>
                             <a:srgbClr val="14161C"/>
                           </a:solidFill>
@@ -9926,7 +9926,7 @@
                         <a:t> bộ</a:t>
                       </a:r>
                       <a:r>
-                        <a:rPr lang="en-US" sz="2400" dirty="0" spc="1" kern="0">
+                        <a:rPr lang="en-US" sz="2550" dirty="0" spc="0" kern="0">
                           <a:solidFill>
                             <a:srgbClr val="14161C"/>
                           </a:solidFill>
@@ -9970,12 +9970,12 @@
                     <a:p>
                       <a:pPr algn="l" indent="0" marL="0">
                         <a:lnSpc>
-                          <a:spcPts val="2880"/>
+                          <a:spcPts val="3060"/>
                         </a:lnSpc>
                         <a:buNone/>
                       </a:pPr>
                       <a:r>
-                        <a:rPr lang="en-US" sz="2400" dirty="0" spc="-7" kern="0">
+                        <a:rPr lang="en-US" sz="2550" dirty="0" spc="-7" kern="0">
                           <a:solidFill>
                             <a:srgbClr val="14161C"/>
                           </a:solidFill>
@@ -9986,7 +9986,7 @@
                         <a:t>Một</a:t>
                       </a:r>
                       <a:r>
-                        <a:rPr lang="en-US" sz="2400" dirty="0" spc="0" kern="0">
+                        <a:rPr lang="en-US" sz="2550" dirty="0" spc="0" kern="0">
                           <a:solidFill>
                             <a:srgbClr val="14161C"/>
                           </a:solidFill>
@@ -9997,7 +9997,7 @@
                         <a:t> tiến</a:t>
                       </a:r>
                       <a:r>
-                        <a:rPr lang="en-US" sz="2400" dirty="0" spc="9" kern="0">
+                        <a:rPr lang="en-US" sz="2550" dirty="0" spc="10" kern="0">
                           <a:solidFill>
                             <a:srgbClr val="14161C"/>
                           </a:solidFill>
@@ -10047,12 +10047,12 @@
                     <a:p>
                       <a:pPr algn="l" indent="0" marL="0">
                         <a:lnSpc>
-                          <a:spcPts val="2880"/>
+                          <a:spcPts val="3060"/>
                         </a:lnSpc>
                         <a:buNone/>
                       </a:pPr>
                       <a:r>
-                        <a:rPr lang="en-US" sz="2400" dirty="0" spc="-31" kern="0">
+                        <a:rPr lang="en-US" sz="2550" dirty="0" spc="-38" kern="0">
                           <a:solidFill>
                             <a:srgbClr val="14161C"/>
                           </a:solidFill>
@@ -10063,7 +10063,7 @@
                         <a:t>Trùng</a:t>
                       </a:r>
                       <a:r>
-                        <a:rPr lang="en-US" sz="2400" dirty="0" spc="10" kern="0">
+                        <a:rPr lang="en-US" sz="2550" dirty="0" spc="7" kern="0">
                           <a:solidFill>
                             <a:srgbClr val="14161C"/>
                           </a:solidFill>
@@ -10074,7 +10074,7 @@
                         <a:t> giữa</a:t>
                       </a:r>
                       <a:r>
-                        <a:rPr lang="en-US" sz="2400" dirty="0" spc="-1" kern="0">
+                        <a:rPr lang="en-US" sz="2550" dirty="0" spc="0" kern="0">
                           <a:solidFill>
                             <a:srgbClr val="14161C"/>
                           </a:solidFill>
@@ -10085,7 +10085,7 @@
                         <a:t> các</a:t>
                       </a:r>
                       <a:r>
-                        <a:rPr lang="en-US" sz="2400" dirty="0" spc="0" kern="0">
+                        <a:rPr lang="en-US" sz="2550" dirty="0" spc="-3" kern="0">
                           <a:solidFill>
                             <a:srgbClr val="14161C"/>
                           </a:solidFill>
@@ -10096,7 +10096,7 @@
                         <a:t> bản</a:t>
                       </a:r>
                       <a:r>
-                        <a:rPr lang="en-US" sz="2400" dirty="0" spc="-6" kern="0">
+                        <a:rPr lang="en-US" sz="2550" dirty="0" spc="-8" kern="0">
                           <a:solidFill>
                             <a:srgbClr val="14161C"/>
                           </a:solidFill>
@@ -10148,12 +10148,12 @@
                     <a:p>
                       <a:pPr algn="l" indent="0" marL="0">
                         <a:lnSpc>
-                          <a:spcPts val="2880"/>
+                          <a:spcPts val="3060"/>
                         </a:lnSpc>
                         <a:buNone/>
                       </a:pPr>
                       <a:r>
-                        <a:rPr lang="en-US" sz="2400" dirty="0" spc="-2" kern="0">
+                        <a:rPr lang="en-US" sz="2550" dirty="0" spc="1" kern="0">
                           <a:solidFill>
                             <a:srgbClr val="14161C"/>
                           </a:solidFill>
@@ -10164,7 +10164,7 @@
                         <a:t>Chuỗi</a:t>
                       </a:r>
                       <a:r>
-                        <a:rPr lang="en-US" sz="2400" dirty="0" spc="1" kern="0">
+                        <a:rPr lang="en-US" sz="2550" dirty="0" spc="2" kern="0">
                           <a:solidFill>
                             <a:srgbClr val="14161C"/>
                           </a:solidFill>
@@ -10175,7 +10175,7 @@
                         <a:t> tuần</a:t>
                       </a:r>
                       <a:r>
-                        <a:rPr lang="en-US" sz="2400" dirty="0" spc="4" kern="0">
+                        <a:rPr lang="en-US" sz="2550" dirty="0" spc="-1" kern="0">
                           <a:solidFill>
                             <a:srgbClr val="14161C"/>
                           </a:solidFill>
@@ -10186,7 +10186,7 @@
                         <a:t> tự</a:t>
                       </a:r>
                       <a:r>
-                        <a:rPr lang="en-US" sz="2400" dirty="0" spc="2" kern="0">
+                        <a:rPr lang="en-US" sz="2550" dirty="0" spc="-2" kern="0">
                           <a:solidFill>
                             <a:srgbClr val="14161C"/>
                           </a:solidFill>
@@ -10197,7 +10197,7 @@
                         <a:t> của</a:t>
                       </a:r>
                       <a:r>
-                        <a:rPr lang="en-US" sz="2400" dirty="0" spc="0" kern="0">
+                        <a:rPr lang="en-US" sz="2550" dirty="0" spc="0" kern="0">
                           <a:solidFill>
                             <a:srgbClr val="14161C"/>
                           </a:solidFill>
@@ -10208,7 +10208,7 @@
                         <a:t> cơ</a:t>
                       </a:r>
                       <a:r>
-                        <a:rPr lang="en-US" sz="2400" dirty="0" spc="-8" kern="0">
+                        <a:rPr lang="en-US" sz="2550" dirty="0" spc="-10" kern="0">
                           <a:solidFill>
                             <a:srgbClr val="14161C"/>
                           </a:solidFill>
@@ -10219,7 +10219,7 @@
                         <a:t> sở</a:t>
                       </a:r>
                       <a:r>
-                        <a:rPr lang="en-US" sz="2400" dirty="0" spc="3" kern="0">
+                        <a:rPr lang="en-US" sz="2550" dirty="0" spc="-2" kern="0">
                           <a:solidFill>
                             <a:srgbClr val="14161C"/>
                           </a:solidFill>
@@ -10230,7 +10230,7 @@
                         <a:t> dữ</a:t>
                       </a:r>
                       <a:r>
-                        <a:rPr lang="en-US" sz="2400" dirty="0" spc="-2" kern="0">
+                        <a:rPr lang="en-US" sz="2550" dirty="0" spc="1" kern="0">
                           <a:solidFill>
                             <a:srgbClr val="14161C"/>
                           </a:solidFill>
@@ -10274,12 +10274,12 @@
                     <a:p>
                       <a:pPr algn="l" indent="0" marL="0">
                         <a:lnSpc>
-                          <a:spcPts val="2880"/>
+                          <a:spcPts val="3060"/>
                         </a:lnSpc>
                         <a:buNone/>
                       </a:pPr>
                       <a:r>
-                        <a:rPr lang="en-US" sz="2400" dirty="0" spc="-1" kern="0">
+                        <a:rPr lang="en-US" sz="2550" dirty="0" spc="-1" kern="0">
                           <a:solidFill>
                             <a:srgbClr val="14161C"/>
                           </a:solidFill>
@@ -10287,10 +10287,21 @@
                           <a:ea typeface="Be Vietnam Pro" pitchFamily="34" charset="-122"/>
                           <a:cs typeface="Be Vietnam Pro" pitchFamily="34" charset="-120"/>
                         </a:rPr>
-                        <a:t>Mọi bản</a:t>
+                        <a:t>Mọi</a:t>
                       </a:r>
                       <a:r>
-                        <a:rPr lang="en-US" sz="2400" dirty="0" spc="-5" kern="0">
+                        <a:rPr lang="en-US" sz="2550" dirty="0" spc="-3" kern="0">
+                          <a:solidFill>
+                            <a:srgbClr val="14161C"/>
+                          </a:solidFill>
+                          <a:latin typeface="Be Vietnam Pro" pitchFamily="34" charset="0"/>
+                          <a:ea typeface="Be Vietnam Pro" pitchFamily="34" charset="-122"/>
+                          <a:cs typeface="Be Vietnam Pro" pitchFamily="34" charset="-120"/>
+                        </a:rPr>
+                        <a:t> bản</a:t>
+                      </a:r>
+                      <a:r>
+                        <a:rPr lang="en-US" sz="2550" dirty="0" spc="-8" kern="0">
                           <a:solidFill>
                             <a:srgbClr val="14161C"/>
                           </a:solidFill>
@@ -10340,12 +10351,12 @@
                     <a:p>
                       <a:pPr algn="l" indent="0" marL="0">
                         <a:lnSpc>
-                          <a:spcPts val="2880"/>
+                          <a:spcPts val="3060"/>
                         </a:lnSpc>
                         <a:buNone/>
                       </a:pPr>
                       <a:r>
-                        <a:rPr lang="en-US" sz="2400" dirty="0" spc="0" kern="0">
+                        <a:rPr lang="en-US" sz="2550" dirty="0" spc="1" kern="0">
                           <a:solidFill>
                             <a:srgbClr val="14161C"/>
                           </a:solidFill>
@@ -10356,7 +10367,7 @@
                         <a:t>Có</a:t>
                       </a:r>
                       <a:r>
-                        <a:rPr lang="en-US" sz="2400" dirty="0" spc="2" kern="0">
+                        <a:rPr lang="en-US" sz="2550" dirty="0" spc="-1" kern="0">
                           <a:solidFill>
                             <a:srgbClr val="14161C"/>
                           </a:solidFill>
@@ -10364,21 +10375,10 @@
                           <a:ea typeface="Be Vietnam Pro" pitchFamily="34" charset="-122"/>
                           <a:cs typeface="Be Vietnam Pro" pitchFamily="34" charset="-120"/>
                         </a:rPr>
-                        <a:t> thứ</a:t>
+                        <a:t> thứ tự,</a:t>
                       </a:r>
                       <a:r>
-                        <a:rPr lang="en-US" sz="2400" dirty="0" spc="3" kern="0">
-                          <a:solidFill>
-                            <a:srgbClr val="14161C"/>
-                          </a:solidFill>
-                          <a:latin typeface="Be Vietnam Pro" pitchFamily="34" charset="0"/>
-                          <a:ea typeface="Be Vietnam Pro" pitchFamily="34" charset="-122"/>
-                          <a:cs typeface="Be Vietnam Pro" pitchFamily="34" charset="-120"/>
-                        </a:rPr>
-                        <a:t> tự,</a:t>
-                      </a:r>
-                      <a:r>
-                        <a:rPr lang="en-US" sz="2400" dirty="0" spc="1" kern="0">
+                        <a:rPr lang="en-US" sz="2550" dirty="0" spc="0" kern="0">
                           <a:solidFill>
                             <a:srgbClr val="14161C"/>
                           </a:solidFill>
@@ -10389,7 +10389,7 @@
                         <a:t> cần</a:t>
                       </a:r>
                       <a:r>
-                        <a:rPr lang="en-US" sz="2400" dirty="0" spc="-10" kern="0">
+                        <a:rPr lang="en-US" sz="2550" dirty="0" spc="-13" kern="0">
                           <a:solidFill>
                             <a:srgbClr val="14161C"/>
                           </a:solidFill>
@@ -10400,7 +10400,7 @@
                         <a:t> gọi</a:t>
                       </a:r>
                       <a:r>
-                        <a:rPr lang="en-US" sz="2400" dirty="0" spc="0" kern="0">
+                        <a:rPr lang="en-US" sz="2550" dirty="0" spc="0" kern="0">
                           <a:solidFill>
                             <a:srgbClr val="14161C"/>
                           </a:solidFill>
@@ -10411,7 +10411,7 @@
                         <a:t> cơ</a:t>
                       </a:r>
                       <a:r>
-                        <a:rPr lang="en-US" sz="2400" dirty="0" spc="-8" kern="0">
+                        <a:rPr lang="en-US" sz="2550" dirty="0" spc="-10" kern="0">
                           <a:solidFill>
                             <a:srgbClr val="14161C"/>
                           </a:solidFill>
@@ -10422,7 +10422,7 @@
                         <a:t> sở</a:t>
                       </a:r>
                       <a:r>
-                        <a:rPr lang="en-US" sz="2400" dirty="0" spc="3" kern="0">
+                        <a:rPr lang="en-US" sz="2550" dirty="0" spc="-3" kern="0">
                           <a:solidFill>
                             <a:srgbClr val="14161C"/>
                           </a:solidFill>
@@ -10433,7 +10433,7 @@
                         <a:t> dữ</a:t>
                       </a:r>
                       <a:r>
-                        <a:rPr lang="en-US" sz="2400" dirty="0" spc="-2" kern="0">
+                        <a:rPr lang="en-US" sz="2550" dirty="0" spc="2" kern="0">
                           <a:solidFill>
                             <a:srgbClr val="14161C"/>
                           </a:solidFill>
@@ -10485,12 +10485,12 @@
                     <a:p>
                       <a:pPr algn="l" indent="0" marL="0">
                         <a:lnSpc>
-                          <a:spcPts val="2880"/>
+                          <a:spcPts val="3060"/>
                         </a:lnSpc>
                         <a:buNone/>
                       </a:pPr>
                       <a:r>
-                        <a:rPr lang="en-US" sz="2400" dirty="0" spc="-1" kern="0">
+                        <a:rPr lang="en-US" sz="2550" dirty="0" spc="-3" kern="0">
                           <a:solidFill>
                             <a:srgbClr val="14161C"/>
                           </a:solidFill>
@@ -10534,12 +10534,12 @@
                     <a:p>
                       <a:pPr algn="l" indent="0" marL="0">
                         <a:lnSpc>
-                          <a:spcPts val="2880"/>
+                          <a:spcPts val="3060"/>
                         </a:lnSpc>
                         <a:buNone/>
                       </a:pPr>
                       <a:r>
-                        <a:rPr lang="en-US" sz="2400" dirty="0" spc="-1" kern="0">
+                        <a:rPr lang="en-US" sz="2550" dirty="0" spc="-1" kern="0">
                           <a:solidFill>
                             <a:srgbClr val="14161C"/>
                           </a:solidFill>
@@ -10547,10 +10547,21 @@
                           <a:ea typeface="Be Vietnam Pro" pitchFamily="34" charset="-122"/>
                           <a:cs typeface="Be Vietnam Pro" pitchFamily="34" charset="-120"/>
                         </a:rPr>
-                        <a:t>Mọi bản</a:t>
+                        <a:t>Mọi</a:t>
                       </a:r>
                       <a:r>
-                        <a:rPr lang="en-US" sz="2400" dirty="0" spc="-5" kern="0">
+                        <a:rPr lang="en-US" sz="2550" dirty="0" spc="-3" kern="0">
+                          <a:solidFill>
+                            <a:srgbClr val="14161C"/>
+                          </a:solidFill>
+                          <a:latin typeface="Be Vietnam Pro" pitchFamily="34" charset="0"/>
+                          <a:ea typeface="Be Vietnam Pro" pitchFamily="34" charset="-122"/>
+                          <a:cs typeface="Be Vietnam Pro" pitchFamily="34" charset="-120"/>
+                        </a:rPr>
+                        <a:t> bản</a:t>
+                      </a:r>
+                      <a:r>
+                        <a:rPr lang="en-US" sz="2550" dirty="0" spc="-8" kern="0">
                           <a:solidFill>
                             <a:srgbClr val="14161C"/>
                           </a:solidFill>
@@ -10600,12 +10611,12 @@
                     <a:p>
                       <a:pPr algn="l" indent="0" marL="0">
                         <a:lnSpc>
-                          <a:spcPts val="2880"/>
+                          <a:spcPts val="3060"/>
                         </a:lnSpc>
                         <a:buNone/>
                       </a:pPr>
                       <a:r>
-                        <a:rPr lang="en-US" sz="2400" dirty="0" spc="2" kern="0">
+                        <a:rPr lang="en-US" sz="2550" dirty="0" spc="-1" kern="0">
                           <a:solidFill>
                             <a:srgbClr val="14161C"/>
                           </a:solidFill>
@@ -10616,7 +10627,7 @@
                         <a:t>Không</a:t>
                       </a:r>
                       <a:r>
-                        <a:rPr lang="en-US" sz="2400" dirty="0" spc="1" kern="0">
+                        <a:rPr lang="en-US" sz="2550" dirty="0" spc="0" kern="0">
                           <a:solidFill>
                             <a:srgbClr val="14161C"/>
                           </a:solidFill>
@@ -10624,7 +10635,29 @@
                           <a:ea typeface="Be Vietnam Pro" pitchFamily="34" charset="-122"/>
                           <a:cs typeface="Be Vietnam Pro" pitchFamily="34" charset="-120"/>
                         </a:rPr>
-                        <a:t> cần phối hợp</a:t>
+                        <a:t> cần</a:t>
+                      </a:r>
+                      <a:r>
+                        <a:rPr lang="en-US" sz="2550" dirty="0" spc="-1" kern="0">
+                          <a:solidFill>
+                            <a:srgbClr val="14161C"/>
+                          </a:solidFill>
+                          <a:latin typeface="Be Vietnam Pro" pitchFamily="34" charset="0"/>
+                          <a:ea typeface="Be Vietnam Pro" pitchFamily="34" charset="-122"/>
+                          <a:cs typeface="Be Vietnam Pro" pitchFamily="34" charset="-120"/>
+                        </a:rPr>
+                        <a:t> phối</a:t>
+                      </a:r>
+                      <a:r>
+                        <a:rPr lang="en-US" sz="2550" dirty="0" spc="0" kern="0">
+                          <a:solidFill>
+                            <a:srgbClr val="14161C"/>
+                          </a:solidFill>
+                          <a:latin typeface="Be Vietnam Pro" pitchFamily="34" charset="0"/>
+                          <a:ea typeface="Be Vietnam Pro" pitchFamily="34" charset="-122"/>
+                          <a:cs typeface="Be Vietnam Pro" pitchFamily="34" charset="-120"/>
+                        </a:rPr>
+                        <a:t> hợp</a:t>
                       </a:r>
                       <a:endParaRPr lang="en-US" sz="1200" dirty="0"/>
                     </a:p>
